--- a/Управление на основе Agile работа№7 (часть2) - Тема №5 (организация данных замена значение ссылкой) Кротов БПИ 23-1.pptx
+++ b/Управление на основе Agile работа№7 (часть2) - Тема №5 (организация данных замена значение ссылкой) Кротов БПИ 23-1.pptx
@@ -6,31 +6,28 @@
   </p:sldMasterIdLst>
   <p:sldIdLst>
     <p:sldId id="256" r:id="rId2"/>
-    <p:sldId id="257" r:id="rId3"/>
-    <p:sldId id="258" r:id="rId4"/>
-    <p:sldId id="259" r:id="rId5"/>
-    <p:sldId id="260" r:id="rId6"/>
-    <p:sldId id="273" r:id="rId7"/>
-    <p:sldId id="261" r:id="rId8"/>
-    <p:sldId id="266" r:id="rId9"/>
-    <p:sldId id="262" r:id="rId10"/>
-    <p:sldId id="263" r:id="rId11"/>
-    <p:sldId id="264" r:id="rId12"/>
-    <p:sldId id="265" r:id="rId13"/>
-    <p:sldId id="268" r:id="rId14"/>
-    <p:sldId id="270" r:id="rId15"/>
-    <p:sldId id="277" r:id="rId16"/>
-    <p:sldId id="276" r:id="rId17"/>
-    <p:sldId id="274" r:id="rId18"/>
-    <p:sldId id="275" r:id="rId19"/>
-    <p:sldId id="278" r:id="rId20"/>
-    <p:sldId id="267" r:id="rId21"/>
-    <p:sldId id="269" r:id="rId22"/>
-    <p:sldId id="281" r:id="rId23"/>
-    <p:sldId id="272" r:id="rId24"/>
-    <p:sldId id="279" r:id="rId25"/>
-    <p:sldId id="280" r:id="rId26"/>
-    <p:sldId id="271" r:id="rId27"/>
+    <p:sldId id="282" r:id="rId3"/>
+    <p:sldId id="257" r:id="rId4"/>
+    <p:sldId id="258" r:id="rId5"/>
+    <p:sldId id="259" r:id="rId6"/>
+    <p:sldId id="260" r:id="rId7"/>
+    <p:sldId id="273" r:id="rId8"/>
+    <p:sldId id="284" r:id="rId9"/>
+    <p:sldId id="285" r:id="rId10"/>
+    <p:sldId id="261" r:id="rId11"/>
+    <p:sldId id="262" r:id="rId12"/>
+    <p:sldId id="263" r:id="rId13"/>
+    <p:sldId id="264" r:id="rId14"/>
+    <p:sldId id="268" r:id="rId15"/>
+    <p:sldId id="265" r:id="rId16"/>
+    <p:sldId id="274" r:id="rId17"/>
+    <p:sldId id="278" r:id="rId18"/>
+    <p:sldId id="267" r:id="rId19"/>
+    <p:sldId id="279" r:id="rId20"/>
+    <p:sldId id="281" r:id="rId21"/>
+    <p:sldId id="280" r:id="rId22"/>
+    <p:sldId id="272" r:id="rId23"/>
+    <p:sldId id="271" r:id="rId24"/>
   </p:sldIdLst>
   <p:sldSz cx="12192000" cy="6858000"/>
   <p:notesSz cx="6858000" cy="9144000"/>
@@ -276,7 +273,7 @@
           <a:p>
             <a:fld id="{42250DE5-868C-496F-84F2-7FB3B8A5A766}" type="datetimeFigureOut">
               <a:rPr lang="ru-RU" smtClean="0"/>
-              <a:t>15.04.2026</a:t>
+              <a:t>20.04.2026</a:t>
             </a:fld>
             <a:endParaRPr lang="ru-RU"/>
           </a:p>
@@ -487,7 +484,7 @@
           <a:p>
             <a:fld id="{42250DE5-868C-496F-84F2-7FB3B8A5A766}" type="datetimeFigureOut">
               <a:rPr lang="ru-RU" smtClean="0"/>
-              <a:t>15.04.2026</a:t>
+              <a:t>20.04.2026</a:t>
             </a:fld>
             <a:endParaRPr lang="ru-RU"/>
           </a:p>
@@ -702,7 +699,7 @@
           <a:p>
             <a:fld id="{42250DE5-868C-496F-84F2-7FB3B8A5A766}" type="datetimeFigureOut">
               <a:rPr lang="ru-RU" smtClean="0"/>
-              <a:t>15.04.2026</a:t>
+              <a:t>20.04.2026</a:t>
             </a:fld>
             <a:endParaRPr lang="ru-RU"/>
           </a:p>
@@ -903,7 +900,7 @@
           <a:p>
             <a:fld id="{42250DE5-868C-496F-84F2-7FB3B8A5A766}" type="datetimeFigureOut">
               <a:rPr lang="ru-RU" smtClean="0"/>
-              <a:t>15.04.2026</a:t>
+              <a:t>20.04.2026</a:t>
             </a:fld>
             <a:endParaRPr lang="ru-RU"/>
           </a:p>
@@ -1182,7 +1179,7 @@
           <a:p>
             <a:fld id="{42250DE5-868C-496F-84F2-7FB3B8A5A766}" type="datetimeFigureOut">
               <a:rPr lang="ru-RU" smtClean="0"/>
-              <a:t>15.04.2026</a:t>
+              <a:t>20.04.2026</a:t>
             </a:fld>
             <a:endParaRPr lang="ru-RU"/>
           </a:p>
@@ -1450,7 +1447,7 @@
           <a:p>
             <a:fld id="{42250DE5-868C-496F-84F2-7FB3B8A5A766}" type="datetimeFigureOut">
               <a:rPr lang="ru-RU" smtClean="0"/>
-              <a:t>15.04.2026</a:t>
+              <a:t>20.04.2026</a:t>
             </a:fld>
             <a:endParaRPr lang="ru-RU"/>
           </a:p>
@@ -1866,7 +1863,7 @@
           <a:p>
             <a:fld id="{42250DE5-868C-496F-84F2-7FB3B8A5A766}" type="datetimeFigureOut">
               <a:rPr lang="ru-RU" smtClean="0"/>
-              <a:t>15.04.2026</a:t>
+              <a:t>20.04.2026</a:t>
             </a:fld>
             <a:endParaRPr lang="ru-RU"/>
           </a:p>
@@ -2015,7 +2012,7 @@
           <a:p>
             <a:fld id="{42250DE5-868C-496F-84F2-7FB3B8A5A766}" type="datetimeFigureOut">
               <a:rPr lang="ru-RU" smtClean="0"/>
-              <a:t>15.04.2026</a:t>
+              <a:t>20.04.2026</a:t>
             </a:fld>
             <a:endParaRPr lang="ru-RU"/>
           </a:p>
@@ -2141,7 +2138,7 @@
           <a:p>
             <a:fld id="{42250DE5-868C-496F-84F2-7FB3B8A5A766}" type="datetimeFigureOut">
               <a:rPr lang="ru-RU" smtClean="0"/>
-              <a:t>15.04.2026</a:t>
+              <a:t>20.04.2026</a:t>
             </a:fld>
             <a:endParaRPr lang="ru-RU"/>
           </a:p>
@@ -2392,7 +2389,7 @@
           <a:p>
             <a:fld id="{42250DE5-868C-496F-84F2-7FB3B8A5A766}" type="datetimeFigureOut">
               <a:rPr lang="ru-RU" smtClean="0"/>
-              <a:t>15.04.2026</a:t>
+              <a:t>20.04.2026</a:t>
             </a:fld>
             <a:endParaRPr lang="ru-RU"/>
           </a:p>
@@ -2837,7 +2834,7 @@
           <a:p>
             <a:fld id="{42250DE5-868C-496F-84F2-7FB3B8A5A766}" type="datetimeFigureOut">
               <a:rPr lang="ru-RU" smtClean="0"/>
-              <a:t>15.04.2026</a:t>
+              <a:t>20.04.2026</a:t>
             </a:fld>
             <a:endParaRPr lang="ru-RU"/>
           </a:p>
@@ -3164,7 +3161,7 @@
           <a:p>
             <a:fld id="{42250DE5-868C-496F-84F2-7FB3B8A5A766}" type="datetimeFigureOut">
               <a:rPr lang="ru-RU" smtClean="0"/>
-              <a:t>15.04.2026</a:t>
+              <a:t>20.04.2026</a:t>
             </a:fld>
             <a:endParaRPr lang="ru-RU"/>
           </a:p>
@@ -3669,7 +3666,7 @@
         <p:spPr>
           <a:xfrm>
             <a:off x="0" y="155449"/>
-            <a:ext cx="9729216" cy="2404872"/>
+            <a:ext cx="11207252" cy="2404872"/>
           </a:xfrm>
         </p:spPr>
         <p:txBody>
@@ -3680,7 +3677,7 @@
           <a:p>
             <a:r>
               <a:rPr lang="ru-RU" dirty="0"/>
-              <a:t>Организация данных:</a:t>
+              <a:t>   Организация данных:</a:t>
             </a:r>
           </a:p>
         </p:txBody>
@@ -3986,6 +3983,217 @@
         <p:cNvPr id="1" name="">
           <a:extLst>
             <a:ext uri="{FF2B5EF4-FFF2-40B4-BE49-F238E27FC236}">
+              <a16:creationId xmlns:a16="http://schemas.microsoft.com/office/drawing/2014/main" id="{E427B614-4177-D7A1-31A9-4D158FEB5D90}"/>
+            </a:ext>
+          </a:extLst>
+        </p:cNvPr>
+        <p:cNvGrpSpPr/>
+        <p:nvPr/>
+      </p:nvGrpSpPr>
+      <p:grpSpPr>
+        <a:xfrm>
+          <a:off x="0" y="0"/>
+          <a:ext cx="0" cy="0"/>
+          <a:chOff x="0" y="0"/>
+          <a:chExt cx="0" cy="0"/>
+        </a:xfrm>
+      </p:grpSpPr>
+      <p:sp>
+        <p:nvSpPr>
+          <p:cNvPr id="2" name="Заголовок 1">
+            <a:extLst>
+              <a:ext uri="{FF2B5EF4-FFF2-40B4-BE49-F238E27FC236}">
+                <a16:creationId xmlns:a16="http://schemas.microsoft.com/office/drawing/2014/main" id="{B319A909-8B42-A190-30D6-259DFFB52C83}"/>
+              </a:ext>
+            </a:extLst>
+          </p:cNvPr>
+          <p:cNvSpPr>
+            <a:spLocks noGrp="1"/>
+          </p:cNvSpPr>
+          <p:nvPr>
+            <p:ph type="title"/>
+          </p:nvPr>
+        </p:nvSpPr>
+        <p:spPr/>
+        <p:txBody>
+          <a:bodyPr/>
+          <a:lstStyle/>
+          <a:p>
+            <a:r>
+              <a:rPr lang="ru-RU" dirty="0"/>
+              <a:t>2. замена ссылки значением </a:t>
+            </a:r>
+          </a:p>
+        </p:txBody>
+      </p:sp>
+      <p:sp>
+        <p:nvSpPr>
+          <p:cNvPr id="3" name="Объект 2">
+            <a:extLst>
+              <a:ext uri="{FF2B5EF4-FFF2-40B4-BE49-F238E27FC236}">
+                <a16:creationId xmlns:a16="http://schemas.microsoft.com/office/drawing/2014/main" id="{3D8AE37E-FAD7-8929-B92F-4F0A6B546C60}"/>
+              </a:ext>
+            </a:extLst>
+          </p:cNvPr>
+          <p:cNvSpPr>
+            <a:spLocks noGrp="1"/>
+          </p:cNvSpPr>
+          <p:nvPr>
+            <p:ph idx="1"/>
+          </p:nvPr>
+        </p:nvSpPr>
+        <p:spPr/>
+        <p:txBody>
+          <a:bodyPr/>
+          <a:lstStyle/>
+          <a:p>
+            <a:r>
+              <a:rPr lang="ru-RU" dirty="0"/>
+              <a:t>Это немного </a:t>
+            </a:r>
+            <a:r>
+              <a:rPr lang="en-US" dirty="0"/>
+              <a:t>“</a:t>
+            </a:r>
+            <a:r>
+              <a:rPr lang="ru-RU" dirty="0"/>
+              <a:t>наоборот</a:t>
+            </a:r>
+            <a:r>
+              <a:rPr lang="en-US" dirty="0"/>
+              <a:t>”</a:t>
+            </a:r>
+            <a:r>
+              <a:rPr lang="ru-RU" dirty="0"/>
+              <a:t> первой задачи. Когда есть необходимость передать ссылочный тип, но работать нужно с </a:t>
+            </a:r>
+            <a:r>
+              <a:rPr lang="ru-RU" b="1" dirty="0"/>
+              <a:t>копией значения</a:t>
+            </a:r>
+            <a:r>
+              <a:rPr lang="ru-RU" dirty="0"/>
+              <a:t>, а не с оригиналом.</a:t>
+            </a:r>
+          </a:p>
+          <a:p>
+            <a:r>
+              <a:rPr lang="ru-RU" dirty="0"/>
+              <a:t>Предположим, что есть логирование ошибок или сообщений от пользователя в чате. Каждый раз, когда пользователь пишет нехорошее сообщение, сервис удаляет его. Однако хитрый пользователь может сначала отправить доброе сообщение с сердечками, а по итогу изменить его на плохое. Вот тут и пригодится это знание</a:t>
+            </a:r>
+          </a:p>
+        </p:txBody>
+      </p:sp>
+    </p:spTree>
+    <p:extLst>
+      <p:ext uri="{BB962C8B-B14F-4D97-AF65-F5344CB8AC3E}">
+        <p14:creationId xmlns:p14="http://schemas.microsoft.com/office/powerpoint/2010/main" val="2568001900"/>
+      </p:ext>
+    </p:extLst>
+  </p:cSld>
+  <p:clrMapOvr>
+    <a:masterClrMapping/>
+  </p:clrMapOvr>
+</p:sld>
+</file>
+
+<file path=ppt/slides/slide11.xml><?xml version="1.0" encoding="utf-8"?>
+<p:sld xmlns:a="http://schemas.openxmlformats.org/drawingml/2006/main" xmlns:r="http://schemas.openxmlformats.org/officeDocument/2006/relationships" xmlns:p="http://schemas.openxmlformats.org/presentationml/2006/main">
+  <p:cSld>
+    <p:spTree>
+      <p:nvGrpSpPr>
+        <p:cNvPr id="1" name="">
+          <a:extLst>
+            <a:ext uri="{FF2B5EF4-FFF2-40B4-BE49-F238E27FC236}">
+              <a16:creationId xmlns:a16="http://schemas.microsoft.com/office/drawing/2014/main" id="{49916EA7-9E49-9D50-EB55-122153255A8F}"/>
+            </a:ext>
+          </a:extLst>
+        </p:cNvPr>
+        <p:cNvGrpSpPr/>
+        <p:nvPr/>
+      </p:nvGrpSpPr>
+      <p:grpSpPr>
+        <a:xfrm>
+          <a:off x="0" y="0"/>
+          <a:ext cx="0" cy="0"/>
+          <a:chOff x="0" y="0"/>
+          <a:chExt cx="0" cy="0"/>
+        </a:xfrm>
+      </p:grpSpPr>
+      <p:sp>
+        <p:nvSpPr>
+          <p:cNvPr id="2" name="Заголовок 1">
+            <a:extLst>
+              <a:ext uri="{FF2B5EF4-FFF2-40B4-BE49-F238E27FC236}">
+                <a16:creationId xmlns:a16="http://schemas.microsoft.com/office/drawing/2014/main" id="{8245E395-5BFB-604E-6BC5-06BBE3184EA4}"/>
+              </a:ext>
+            </a:extLst>
+          </p:cNvPr>
+          <p:cNvSpPr>
+            <a:spLocks noGrp="1"/>
+          </p:cNvSpPr>
+          <p:nvPr>
+            <p:ph type="title"/>
+          </p:nvPr>
+        </p:nvSpPr>
+        <p:spPr/>
+        <p:txBody>
+          <a:bodyPr/>
+          <a:lstStyle/>
+          <a:p>
+            <a:r>
+              <a:rPr lang="ru-RU" dirty="0"/>
+              <a:t>3. Дублирование видимых данных</a:t>
+            </a:r>
+          </a:p>
+        </p:txBody>
+      </p:sp>
+      <p:sp>
+        <p:nvSpPr>
+          <p:cNvPr id="3" name="Объект 2">
+            <a:extLst>
+              <a:ext uri="{FF2B5EF4-FFF2-40B4-BE49-F238E27FC236}">
+                <a16:creationId xmlns:a16="http://schemas.microsoft.com/office/drawing/2014/main" id="{1829D0BC-74B0-EB6F-1449-88DB56753D7F}"/>
+              </a:ext>
+            </a:extLst>
+          </p:cNvPr>
+          <p:cNvSpPr>
+            <a:spLocks noGrp="1"/>
+          </p:cNvSpPr>
+          <p:nvPr>
+            <p:ph idx="1"/>
+          </p:nvPr>
+        </p:nvSpPr>
+        <p:spPr/>
+        <p:txBody>
+          <a:bodyPr/>
+          <a:lstStyle/>
+          <a:p>
+            <a:endParaRPr lang="ru-RU"/>
+          </a:p>
+        </p:txBody>
+      </p:sp>
+    </p:spTree>
+    <p:extLst>
+      <p:ext uri="{BB962C8B-B14F-4D97-AF65-F5344CB8AC3E}">
+        <p14:creationId xmlns:p14="http://schemas.microsoft.com/office/powerpoint/2010/main" val="2429912846"/>
+      </p:ext>
+    </p:extLst>
+  </p:cSld>
+  <p:clrMapOvr>
+    <a:masterClrMapping/>
+  </p:clrMapOvr>
+</p:sld>
+</file>
+
+<file path=ppt/slides/slide12.xml><?xml version="1.0" encoding="utf-8"?>
+<p:sld xmlns:a="http://schemas.openxmlformats.org/drawingml/2006/main" xmlns:r="http://schemas.openxmlformats.org/officeDocument/2006/relationships" xmlns:p="http://schemas.openxmlformats.org/presentationml/2006/main">
+  <p:cSld>
+    <p:spTree>
+      <p:nvGrpSpPr>
+        <p:cNvPr id="1" name="">
+          <a:extLst>
+            <a:ext uri="{FF2B5EF4-FFF2-40B4-BE49-F238E27FC236}">
               <a16:creationId xmlns:a16="http://schemas.microsoft.com/office/drawing/2014/main" id="{E7391394-8123-4CF6-8472-BAB7C85B14DA}"/>
             </a:ext>
           </a:extLst>
@@ -4064,7 +4272,7 @@
 </p:sld>
 </file>
 
-<file path=ppt/slides/slide11.xml><?xml version="1.0" encoding="utf-8"?>
+<file path=ppt/slides/slide13.xml><?xml version="1.0" encoding="utf-8"?>
 <p:sld xmlns:a="http://schemas.openxmlformats.org/drawingml/2006/main" xmlns:r="http://schemas.openxmlformats.org/officeDocument/2006/relationships" xmlns:p="http://schemas.openxmlformats.org/presentationml/2006/main">
   <p:cSld>
     <p:spTree>
@@ -4139,15 +4347,53 @@
             <p:ph idx="1"/>
           </p:nvPr>
         </p:nvSpPr>
-        <p:spPr/>
+        <p:spPr>
+          <a:xfrm>
+            <a:off x="1294362" y="1947999"/>
+            <a:ext cx="9603275" cy="3450613"/>
+          </a:xfrm>
+        </p:spPr>
         <p:txBody>
           <a:bodyPr/>
           <a:lstStyle/>
           <a:p>
-            <a:endParaRPr lang="ru-RU" dirty="0"/>
-          </a:p>
-        </p:txBody>
-      </p:sp>
+            <a:r>
+              <a:rPr lang="ru-RU" dirty="0"/>
+              <a:t>Суть: ограничение доступности к свойствам класса для безопасности. Поле класса доступно только через свойство (геттер/сеттер), даже внутри самого класса.</a:t>
+            </a:r>
+          </a:p>
+        </p:txBody>
+      </p:sp>
+      <p:pic>
+        <p:nvPicPr>
+          <p:cNvPr id="5" name="Рисунок 4">
+            <a:extLst>
+              <a:ext uri="{FF2B5EF4-FFF2-40B4-BE49-F238E27FC236}">
+                <a16:creationId xmlns:a16="http://schemas.microsoft.com/office/drawing/2014/main" id="{98A6364F-6AAF-1497-DB93-6E1EA78D7142}"/>
+              </a:ext>
+            </a:extLst>
+          </p:cNvPr>
+          <p:cNvPicPr>
+            <a:picLocks noChangeAspect="1"/>
+          </p:cNvPicPr>
+          <p:nvPr/>
+        </p:nvPicPr>
+        <p:blipFill>
+          <a:blip r:embed="rId2"/>
+          <a:stretch>
+            <a:fillRect/>
+          </a:stretch>
+        </p:blipFill>
+        <p:spPr>
+          <a:xfrm>
+            <a:off x="249956" y="2774379"/>
+            <a:ext cx="2889002" cy="3279102"/>
+          </a:xfrm>
+          <a:prstGeom prst="rect">
+            <a:avLst/>
+          </a:prstGeom>
+        </p:spPr>
+      </p:pic>
     </p:spTree>
     <p:extLst>
       <p:ext uri="{BB962C8B-B14F-4D97-AF65-F5344CB8AC3E}">
@@ -4161,7 +4407,183 @@
 </p:sld>
 </file>
 
-<file path=ppt/slides/slide12.xml><?xml version="1.0" encoding="utf-8"?>
+<file path=ppt/slides/slide14.xml><?xml version="1.0" encoding="utf-8"?>
+<p:sld xmlns:a="http://schemas.openxmlformats.org/drawingml/2006/main" xmlns:r="http://schemas.openxmlformats.org/officeDocument/2006/relationships" xmlns:p="http://schemas.openxmlformats.org/presentationml/2006/main">
+  <p:cSld>
+    <p:spTree>
+      <p:nvGrpSpPr>
+        <p:cNvPr id="1" name="">
+          <a:extLst>
+            <a:ext uri="{FF2B5EF4-FFF2-40B4-BE49-F238E27FC236}">
+              <a16:creationId xmlns:a16="http://schemas.microsoft.com/office/drawing/2014/main" id="{08BB3C4A-DA81-AA6B-9932-51E8106BC70F}"/>
+            </a:ext>
+          </a:extLst>
+        </p:cNvPr>
+        <p:cNvGrpSpPr/>
+        <p:nvPr/>
+      </p:nvGrpSpPr>
+      <p:grpSpPr>
+        <a:xfrm>
+          <a:off x="0" y="0"/>
+          <a:ext cx="0" cy="0"/>
+          <a:chOff x="0" y="0"/>
+          <a:chExt cx="0" cy="0"/>
+        </a:xfrm>
+      </p:grpSpPr>
+      <p:sp>
+        <p:nvSpPr>
+          <p:cNvPr id="2" name="Заголовок 1">
+            <a:extLst>
+              <a:ext uri="{FF2B5EF4-FFF2-40B4-BE49-F238E27FC236}">
+                <a16:creationId xmlns:a16="http://schemas.microsoft.com/office/drawing/2014/main" id="{205AC407-7075-FC97-79FF-40DEF3F697F9}"/>
+              </a:ext>
+            </a:extLst>
+          </p:cNvPr>
+          <p:cNvSpPr>
+            <a:spLocks noGrp="1"/>
+          </p:cNvSpPr>
+          <p:nvPr>
+            <p:ph type="title"/>
+          </p:nvPr>
+        </p:nvSpPr>
+        <p:spPr/>
+        <p:txBody>
+          <a:bodyPr/>
+          <a:lstStyle/>
+          <a:p>
+            <a:endParaRPr lang="ru-RU"/>
+          </a:p>
+        </p:txBody>
+      </p:sp>
+      <p:pic>
+        <p:nvPicPr>
+          <p:cNvPr id="7" name="Рисунок 6">
+            <a:extLst>
+              <a:ext uri="{FF2B5EF4-FFF2-40B4-BE49-F238E27FC236}">
+                <a16:creationId xmlns:a16="http://schemas.microsoft.com/office/drawing/2014/main" id="{007201AF-0E33-4755-6163-13710A3DD0D5}"/>
+              </a:ext>
+            </a:extLst>
+          </p:cNvPr>
+          <p:cNvPicPr>
+            <a:picLocks noChangeAspect="1"/>
+          </p:cNvPicPr>
+          <p:nvPr/>
+        </p:nvPicPr>
+        <p:blipFill>
+          <a:blip r:embed="rId2"/>
+          <a:stretch>
+            <a:fillRect/>
+          </a:stretch>
+        </p:blipFill>
+        <p:spPr>
+          <a:xfrm>
+            <a:off x="208393" y="3053780"/>
+            <a:ext cx="5269542" cy="3599984"/>
+          </a:xfrm>
+          <a:prstGeom prst="rect">
+            <a:avLst/>
+          </a:prstGeom>
+        </p:spPr>
+      </p:pic>
+      <p:sp>
+        <p:nvSpPr>
+          <p:cNvPr id="9" name="Объект 8">
+            <a:extLst>
+              <a:ext uri="{FF2B5EF4-FFF2-40B4-BE49-F238E27FC236}">
+                <a16:creationId xmlns:a16="http://schemas.microsoft.com/office/drawing/2014/main" id="{BA810B6F-0D7A-E355-CB5C-25BF645EA301}"/>
+              </a:ext>
+            </a:extLst>
+          </p:cNvPr>
+          <p:cNvSpPr>
+            <a:spLocks noGrp="1"/>
+          </p:cNvSpPr>
+          <p:nvPr>
+            <p:ph idx="1"/>
+          </p:nvPr>
+        </p:nvSpPr>
+        <p:spPr/>
+        <p:txBody>
+          <a:bodyPr/>
+          <a:lstStyle/>
+          <a:p>
+            <a:endParaRPr lang="ru-RU"/>
+          </a:p>
+        </p:txBody>
+      </p:sp>
+      <p:pic>
+        <p:nvPicPr>
+          <p:cNvPr id="11" name="Рисунок 10">
+            <a:extLst>
+              <a:ext uri="{FF2B5EF4-FFF2-40B4-BE49-F238E27FC236}">
+                <a16:creationId xmlns:a16="http://schemas.microsoft.com/office/drawing/2014/main" id="{DA49F4A0-2367-163F-015B-9560C1829B02}"/>
+              </a:ext>
+            </a:extLst>
+          </p:cNvPr>
+          <p:cNvPicPr>
+            <a:picLocks noChangeAspect="1"/>
+          </p:cNvPicPr>
+          <p:nvPr/>
+        </p:nvPicPr>
+        <p:blipFill>
+          <a:blip r:embed="rId3"/>
+          <a:stretch>
+            <a:fillRect/>
+          </a:stretch>
+        </p:blipFill>
+        <p:spPr>
+          <a:xfrm>
+            <a:off x="208393" y="153391"/>
+            <a:ext cx="7362825" cy="2819400"/>
+          </a:xfrm>
+          <a:prstGeom prst="rect">
+            <a:avLst/>
+          </a:prstGeom>
+        </p:spPr>
+      </p:pic>
+      <p:pic>
+        <p:nvPicPr>
+          <p:cNvPr id="12" name="Объект 4">
+            <a:extLst>
+              <a:ext uri="{FF2B5EF4-FFF2-40B4-BE49-F238E27FC236}">
+                <a16:creationId xmlns:a16="http://schemas.microsoft.com/office/drawing/2014/main" id="{47DBFF2B-A15B-CB3A-4C74-A6F15AEE4087}"/>
+              </a:ext>
+            </a:extLst>
+          </p:cNvPr>
+          <p:cNvPicPr>
+            <a:picLocks noChangeAspect="1"/>
+          </p:cNvPicPr>
+          <p:nvPr/>
+        </p:nvPicPr>
+        <p:blipFill>
+          <a:blip r:embed="rId4"/>
+          <a:stretch>
+            <a:fillRect/>
+          </a:stretch>
+        </p:blipFill>
+        <p:spPr>
+          <a:xfrm>
+            <a:off x="5654247" y="3053780"/>
+            <a:ext cx="5055863" cy="2060087"/>
+          </a:xfrm>
+          <a:prstGeom prst="rect">
+            <a:avLst/>
+          </a:prstGeom>
+        </p:spPr>
+      </p:pic>
+    </p:spTree>
+    <p:extLst>
+      <p:ext uri="{BB962C8B-B14F-4D97-AF65-F5344CB8AC3E}">
+        <p14:creationId xmlns:p14="http://schemas.microsoft.com/office/powerpoint/2010/main" val="3278200960"/>
+      </p:ext>
+    </p:extLst>
+  </p:cSld>
+  <p:clrMapOvr>
+    <a:masterClrMapping/>
+  </p:clrMapOvr>
+</p:sld>
+</file>
+
+<file path=ppt/slides/slide15.xml><?xml version="1.0" encoding="utf-8"?>
 <p:sld xmlns:a="http://schemas.openxmlformats.org/drawingml/2006/main" xmlns:r="http://schemas.openxmlformats.org/officeDocument/2006/relationships" xmlns:p="http://schemas.openxmlformats.org/presentationml/2006/main">
   <p:cSld>
     <p:spTree>
@@ -4209,31 +4631,98 @@
           </a:p>
         </p:txBody>
       </p:sp>
-      <p:sp>
-        <p:nvSpPr>
-          <p:cNvPr id="3" name="Объект 2">
+      <p:pic>
+        <p:nvPicPr>
+          <p:cNvPr id="5" name="Объект 4">
             <a:extLst>
               <a:ext uri="{FF2B5EF4-FFF2-40B4-BE49-F238E27FC236}">
-                <a16:creationId xmlns:a16="http://schemas.microsoft.com/office/drawing/2014/main" id="{23F4A138-E49F-5E1B-1916-2AFF4360B07A}"/>
+                <a16:creationId xmlns:a16="http://schemas.microsoft.com/office/drawing/2014/main" id="{6EC4B101-CC43-3C8F-78E1-EAACFC3BD4C9}"/>
               </a:ext>
             </a:extLst>
           </p:cNvPr>
-          <p:cNvSpPr>
-            <a:spLocks noGrp="1"/>
-          </p:cNvSpPr>
+          <p:cNvPicPr>
+            <a:picLocks noGrp="1" noChangeAspect="1"/>
+          </p:cNvPicPr>
           <p:nvPr>
             <p:ph idx="1"/>
           </p:nvPr>
-        </p:nvSpPr>
-        <p:spPr/>
-        <p:txBody>
-          <a:bodyPr/>
-          <a:lstStyle/>
-          <a:p>
-            <a:endParaRPr lang="ru-RU"/>
-          </a:p>
-        </p:txBody>
-      </p:sp>
+        </p:nvPicPr>
+        <p:blipFill>
+          <a:blip r:embed="rId2"/>
+          <a:stretch>
+            <a:fillRect/>
+          </a:stretch>
+        </p:blipFill>
+        <p:spPr>
+          <a:xfrm>
+            <a:off x="0" y="-20639"/>
+            <a:ext cx="5966894" cy="3737505"/>
+          </a:xfrm>
+          <a:prstGeom prst="rect">
+            <a:avLst/>
+          </a:prstGeom>
+        </p:spPr>
+      </p:pic>
+      <p:pic>
+        <p:nvPicPr>
+          <p:cNvPr id="7" name="Рисунок 6">
+            <a:extLst>
+              <a:ext uri="{FF2B5EF4-FFF2-40B4-BE49-F238E27FC236}">
+                <a16:creationId xmlns:a16="http://schemas.microsoft.com/office/drawing/2014/main" id="{BD72FEC3-8404-184B-4B0F-D3740110B62E}"/>
+              </a:ext>
+            </a:extLst>
+          </p:cNvPr>
+          <p:cNvPicPr>
+            <a:picLocks noChangeAspect="1"/>
+          </p:cNvPicPr>
+          <p:nvPr/>
+        </p:nvPicPr>
+        <p:blipFill>
+          <a:blip r:embed="rId3"/>
+          <a:stretch>
+            <a:fillRect/>
+          </a:stretch>
+        </p:blipFill>
+        <p:spPr>
+          <a:xfrm>
+            <a:off x="5966893" y="-20639"/>
+            <a:ext cx="6579033" cy="3737505"/>
+          </a:xfrm>
+          <a:prstGeom prst="rect">
+            <a:avLst/>
+          </a:prstGeom>
+        </p:spPr>
+      </p:pic>
+      <p:pic>
+        <p:nvPicPr>
+          <p:cNvPr id="9" name="Рисунок 8">
+            <a:extLst>
+              <a:ext uri="{FF2B5EF4-FFF2-40B4-BE49-F238E27FC236}">
+                <a16:creationId xmlns:a16="http://schemas.microsoft.com/office/drawing/2014/main" id="{07265FF9-BA96-0024-7B00-307D24A0252C}"/>
+              </a:ext>
+            </a:extLst>
+          </p:cNvPr>
+          <p:cNvPicPr>
+            <a:picLocks noChangeAspect="1"/>
+          </p:cNvPicPr>
+          <p:nvPr/>
+        </p:nvPicPr>
+        <p:blipFill>
+          <a:blip r:embed="rId4"/>
+          <a:stretch>
+            <a:fillRect/>
+          </a:stretch>
+        </p:blipFill>
+        <p:spPr>
+          <a:xfrm>
+            <a:off x="1709599" y="4109866"/>
+            <a:ext cx="7400535" cy="1864645"/>
+          </a:xfrm>
+          <a:prstGeom prst="rect">
+            <a:avLst/>
+          </a:prstGeom>
+        </p:spPr>
+      </p:pic>
     </p:spTree>
     <p:extLst>
       <p:ext uri="{BB962C8B-B14F-4D97-AF65-F5344CB8AC3E}">
@@ -4247,359 +4736,7 @@
 </p:sld>
 </file>
 
-<file path=ppt/slides/slide13.xml><?xml version="1.0" encoding="utf-8"?>
-<p:sld xmlns:a="http://schemas.openxmlformats.org/drawingml/2006/main" xmlns:r="http://schemas.openxmlformats.org/officeDocument/2006/relationships" xmlns:p="http://schemas.openxmlformats.org/presentationml/2006/main">
-  <p:cSld>
-    <p:spTree>
-      <p:nvGrpSpPr>
-        <p:cNvPr id="1" name="">
-          <a:extLst>
-            <a:ext uri="{FF2B5EF4-FFF2-40B4-BE49-F238E27FC236}">
-              <a16:creationId xmlns:a16="http://schemas.microsoft.com/office/drawing/2014/main" id="{08BB3C4A-DA81-AA6B-9932-51E8106BC70F}"/>
-            </a:ext>
-          </a:extLst>
-        </p:cNvPr>
-        <p:cNvGrpSpPr/>
-        <p:nvPr/>
-      </p:nvGrpSpPr>
-      <p:grpSpPr>
-        <a:xfrm>
-          <a:off x="0" y="0"/>
-          <a:ext cx="0" cy="0"/>
-          <a:chOff x="0" y="0"/>
-          <a:chExt cx="0" cy="0"/>
-        </a:xfrm>
-      </p:grpSpPr>
-      <p:sp>
-        <p:nvSpPr>
-          <p:cNvPr id="2" name="Заголовок 1">
-            <a:extLst>
-              <a:ext uri="{FF2B5EF4-FFF2-40B4-BE49-F238E27FC236}">
-                <a16:creationId xmlns:a16="http://schemas.microsoft.com/office/drawing/2014/main" id="{205AC407-7075-FC97-79FF-40DEF3F697F9}"/>
-              </a:ext>
-            </a:extLst>
-          </p:cNvPr>
-          <p:cNvSpPr>
-            <a:spLocks noGrp="1"/>
-          </p:cNvSpPr>
-          <p:nvPr>
-            <p:ph type="title"/>
-          </p:nvPr>
-        </p:nvSpPr>
-        <p:spPr/>
-        <p:txBody>
-          <a:bodyPr/>
-          <a:lstStyle/>
-          <a:p>
-            <a:endParaRPr lang="ru-RU"/>
-          </a:p>
-        </p:txBody>
-      </p:sp>
-      <p:pic>
-        <p:nvPicPr>
-          <p:cNvPr id="5" name="Объект 4">
-            <a:extLst>
-              <a:ext uri="{FF2B5EF4-FFF2-40B4-BE49-F238E27FC236}">
-                <a16:creationId xmlns:a16="http://schemas.microsoft.com/office/drawing/2014/main" id="{1FDEEF96-74E8-3A9A-7BAE-512DBF41A433}"/>
-              </a:ext>
-            </a:extLst>
-          </p:cNvPr>
-          <p:cNvPicPr>
-            <a:picLocks noGrp="1" noChangeAspect="1"/>
-          </p:cNvPicPr>
-          <p:nvPr>
-            <p:ph idx="1"/>
-          </p:nvPr>
-        </p:nvPicPr>
-        <p:blipFill>
-          <a:blip r:embed="rId2"/>
-          <a:stretch>
-            <a:fillRect/>
-          </a:stretch>
-        </p:blipFill>
-        <p:spPr>
-          <a:xfrm>
-            <a:off x="2570935" y="2016125"/>
-            <a:ext cx="7364454" cy="3449638"/>
-          </a:xfrm>
-          <a:prstGeom prst="rect">
-            <a:avLst/>
-          </a:prstGeom>
-        </p:spPr>
-      </p:pic>
-    </p:spTree>
-    <p:extLst>
-      <p:ext uri="{BB962C8B-B14F-4D97-AF65-F5344CB8AC3E}">
-        <p14:creationId xmlns:p14="http://schemas.microsoft.com/office/powerpoint/2010/main" val="3278200960"/>
-      </p:ext>
-    </p:extLst>
-  </p:cSld>
-  <p:clrMapOvr>
-    <a:masterClrMapping/>
-  </p:clrMapOvr>
-</p:sld>
-</file>
-
-<file path=ppt/slides/slide14.xml><?xml version="1.0" encoding="utf-8"?>
-<p:sld xmlns:a="http://schemas.openxmlformats.org/drawingml/2006/main" xmlns:r="http://schemas.openxmlformats.org/officeDocument/2006/relationships" xmlns:p="http://schemas.openxmlformats.org/presentationml/2006/main">
-  <p:cSld>
-    <p:spTree>
-      <p:nvGrpSpPr>
-        <p:cNvPr id="1" name=""/>
-        <p:cNvGrpSpPr/>
-        <p:nvPr/>
-      </p:nvGrpSpPr>
-      <p:grpSpPr>
-        <a:xfrm>
-          <a:off x="0" y="0"/>
-          <a:ext cx="0" cy="0"/>
-          <a:chOff x="0" y="0"/>
-          <a:chExt cx="0" cy="0"/>
-        </a:xfrm>
-      </p:grpSpPr>
-      <p:sp>
-        <p:nvSpPr>
-          <p:cNvPr id="2" name="Заголовок 1">
-            <a:extLst>
-              <a:ext uri="{FF2B5EF4-FFF2-40B4-BE49-F238E27FC236}">
-                <a16:creationId xmlns:a16="http://schemas.microsoft.com/office/drawing/2014/main" id="{8C71034E-A03D-B8B4-B408-CC1772DEA109}"/>
-              </a:ext>
-            </a:extLst>
-          </p:cNvPr>
-          <p:cNvSpPr>
-            <a:spLocks noGrp="1"/>
-          </p:cNvSpPr>
-          <p:nvPr>
-            <p:ph type="title"/>
-          </p:nvPr>
-        </p:nvSpPr>
-        <p:spPr/>
-        <p:txBody>
-          <a:bodyPr/>
-          <a:lstStyle/>
-          <a:p>
-            <a:endParaRPr lang="ru-RU"/>
-          </a:p>
-        </p:txBody>
-      </p:sp>
-      <p:sp>
-        <p:nvSpPr>
-          <p:cNvPr id="3" name="Объект 2">
-            <a:extLst>
-              <a:ext uri="{FF2B5EF4-FFF2-40B4-BE49-F238E27FC236}">
-                <a16:creationId xmlns:a16="http://schemas.microsoft.com/office/drawing/2014/main" id="{B7130B88-D8D6-097B-CC49-A0C19E5259D3}"/>
-              </a:ext>
-            </a:extLst>
-          </p:cNvPr>
-          <p:cNvSpPr>
-            <a:spLocks noGrp="1"/>
-          </p:cNvSpPr>
-          <p:nvPr>
-            <p:ph idx="1"/>
-          </p:nvPr>
-        </p:nvSpPr>
-        <p:spPr/>
-        <p:txBody>
-          <a:bodyPr/>
-          <a:lstStyle/>
-          <a:p>
-            <a:endParaRPr lang="ru-RU"/>
-          </a:p>
-        </p:txBody>
-      </p:sp>
-    </p:spTree>
-    <p:extLst>
-      <p:ext uri="{BB962C8B-B14F-4D97-AF65-F5344CB8AC3E}">
-        <p14:creationId xmlns:p14="http://schemas.microsoft.com/office/powerpoint/2010/main" val="186740937"/>
-      </p:ext>
-    </p:extLst>
-  </p:cSld>
-  <p:clrMapOvr>
-    <a:masterClrMapping/>
-  </p:clrMapOvr>
-</p:sld>
-</file>
-
-<file path=ppt/slides/slide15.xml><?xml version="1.0" encoding="utf-8"?>
-<p:sld xmlns:a="http://schemas.openxmlformats.org/drawingml/2006/main" xmlns:r="http://schemas.openxmlformats.org/officeDocument/2006/relationships" xmlns:p="http://schemas.openxmlformats.org/presentationml/2006/main">
-  <p:cSld>
-    <p:spTree>
-      <p:nvGrpSpPr>
-        <p:cNvPr id="1" name="">
-          <a:extLst>
-            <a:ext uri="{FF2B5EF4-FFF2-40B4-BE49-F238E27FC236}">
-              <a16:creationId xmlns:a16="http://schemas.microsoft.com/office/drawing/2014/main" id="{82B6E567-9FF3-6C3C-B1D0-E2C67AB26296}"/>
-            </a:ext>
-          </a:extLst>
-        </p:cNvPr>
-        <p:cNvGrpSpPr/>
-        <p:nvPr/>
-      </p:nvGrpSpPr>
-      <p:grpSpPr>
-        <a:xfrm>
-          <a:off x="0" y="0"/>
-          <a:ext cx="0" cy="0"/>
-          <a:chOff x="0" y="0"/>
-          <a:chExt cx="0" cy="0"/>
-        </a:xfrm>
-      </p:grpSpPr>
-      <p:sp>
-        <p:nvSpPr>
-          <p:cNvPr id="2" name="Заголовок 1">
-            <a:extLst>
-              <a:ext uri="{FF2B5EF4-FFF2-40B4-BE49-F238E27FC236}">
-                <a16:creationId xmlns:a16="http://schemas.microsoft.com/office/drawing/2014/main" id="{B28C99DB-04FD-9306-7DFB-7380E05D8928}"/>
-              </a:ext>
-            </a:extLst>
-          </p:cNvPr>
-          <p:cNvSpPr>
-            <a:spLocks noGrp="1"/>
-          </p:cNvSpPr>
-          <p:nvPr>
-            <p:ph type="title"/>
-          </p:nvPr>
-        </p:nvSpPr>
-        <p:spPr/>
-        <p:txBody>
-          <a:bodyPr/>
-          <a:lstStyle/>
-          <a:p>
-            <a:endParaRPr lang="ru-RU"/>
-          </a:p>
-        </p:txBody>
-      </p:sp>
-      <p:sp>
-        <p:nvSpPr>
-          <p:cNvPr id="3" name="Объект 2">
-            <a:extLst>
-              <a:ext uri="{FF2B5EF4-FFF2-40B4-BE49-F238E27FC236}">
-                <a16:creationId xmlns:a16="http://schemas.microsoft.com/office/drawing/2014/main" id="{77C79C64-B301-26E7-0301-9A9B01F79D37}"/>
-              </a:ext>
-            </a:extLst>
-          </p:cNvPr>
-          <p:cNvSpPr>
-            <a:spLocks noGrp="1"/>
-          </p:cNvSpPr>
-          <p:nvPr>
-            <p:ph idx="1"/>
-          </p:nvPr>
-        </p:nvSpPr>
-        <p:spPr/>
-        <p:txBody>
-          <a:bodyPr/>
-          <a:lstStyle/>
-          <a:p>
-            <a:endParaRPr lang="ru-RU"/>
-          </a:p>
-        </p:txBody>
-      </p:sp>
-    </p:spTree>
-    <p:extLst>
-      <p:ext uri="{BB962C8B-B14F-4D97-AF65-F5344CB8AC3E}">
-        <p14:creationId xmlns:p14="http://schemas.microsoft.com/office/powerpoint/2010/main" val="164211300"/>
-      </p:ext>
-    </p:extLst>
-  </p:cSld>
-  <p:clrMapOvr>
-    <a:masterClrMapping/>
-  </p:clrMapOvr>
-</p:sld>
-</file>
-
 <file path=ppt/slides/slide16.xml><?xml version="1.0" encoding="utf-8"?>
-<p:sld xmlns:a="http://schemas.openxmlformats.org/drawingml/2006/main" xmlns:r="http://schemas.openxmlformats.org/officeDocument/2006/relationships" xmlns:p="http://schemas.openxmlformats.org/presentationml/2006/main">
-  <p:cSld>
-    <p:spTree>
-      <p:nvGrpSpPr>
-        <p:cNvPr id="1" name="">
-          <a:extLst>
-            <a:ext uri="{FF2B5EF4-FFF2-40B4-BE49-F238E27FC236}">
-              <a16:creationId xmlns:a16="http://schemas.microsoft.com/office/drawing/2014/main" id="{FA62FBAE-25F1-B01F-65B7-D9C8E635277F}"/>
-            </a:ext>
-          </a:extLst>
-        </p:cNvPr>
-        <p:cNvGrpSpPr/>
-        <p:nvPr/>
-      </p:nvGrpSpPr>
-      <p:grpSpPr>
-        <a:xfrm>
-          <a:off x="0" y="0"/>
-          <a:ext cx="0" cy="0"/>
-          <a:chOff x="0" y="0"/>
-          <a:chExt cx="0" cy="0"/>
-        </a:xfrm>
-      </p:grpSpPr>
-      <p:sp>
-        <p:nvSpPr>
-          <p:cNvPr id="2" name="Заголовок 1">
-            <a:extLst>
-              <a:ext uri="{FF2B5EF4-FFF2-40B4-BE49-F238E27FC236}">
-                <a16:creationId xmlns:a16="http://schemas.microsoft.com/office/drawing/2014/main" id="{FCC4FDC6-E7FB-B32B-1667-EAA114EAF2EE}"/>
-              </a:ext>
-            </a:extLst>
-          </p:cNvPr>
-          <p:cNvSpPr>
-            <a:spLocks noGrp="1"/>
-          </p:cNvSpPr>
-          <p:nvPr>
-            <p:ph type="title"/>
-          </p:nvPr>
-        </p:nvSpPr>
-        <p:spPr/>
-        <p:txBody>
-          <a:bodyPr/>
-          <a:lstStyle/>
-          <a:p>
-            <a:endParaRPr lang="ru-RU"/>
-          </a:p>
-        </p:txBody>
-      </p:sp>
-      <p:pic>
-        <p:nvPicPr>
-          <p:cNvPr id="5" name="Объект 4">
-            <a:extLst>
-              <a:ext uri="{FF2B5EF4-FFF2-40B4-BE49-F238E27FC236}">
-                <a16:creationId xmlns:a16="http://schemas.microsoft.com/office/drawing/2014/main" id="{47DBFF2B-A15B-CB3A-4C74-A6F15AEE4087}"/>
-              </a:ext>
-            </a:extLst>
-          </p:cNvPr>
-          <p:cNvPicPr>
-            <a:picLocks noGrp="1" noChangeAspect="1"/>
-          </p:cNvPicPr>
-          <p:nvPr>
-            <p:ph idx="1"/>
-          </p:nvPr>
-        </p:nvPicPr>
-        <p:blipFill>
-          <a:blip r:embed="rId2"/>
-          <a:stretch>
-            <a:fillRect/>
-          </a:stretch>
-        </p:blipFill>
-        <p:spPr>
-          <a:xfrm>
-            <a:off x="3190447" y="2492995"/>
-            <a:ext cx="6125430" cy="2495898"/>
-          </a:xfrm>
-          <a:prstGeom prst="rect">
-            <a:avLst/>
-          </a:prstGeom>
-        </p:spPr>
-      </p:pic>
-    </p:spTree>
-    <p:extLst>
-      <p:ext uri="{BB962C8B-B14F-4D97-AF65-F5344CB8AC3E}">
-        <p14:creationId xmlns:p14="http://schemas.microsoft.com/office/powerpoint/2010/main" val="4139404094"/>
-      </p:ext>
-    </p:extLst>
-  </p:cSld>
-  <p:clrMapOvr>
-    <a:masterClrMapping/>
-  </p:clrMapOvr>
-</p:sld>
-</file>
-
-<file path=ppt/slides/slide17.xml><?xml version="1.0" encoding="utf-8"?>
 <p:sld xmlns:a="http://schemas.openxmlformats.org/drawingml/2006/main" xmlns:r="http://schemas.openxmlformats.org/officeDocument/2006/relationships" xmlns:p="http://schemas.openxmlformats.org/presentationml/2006/main">
   <p:cSld>
     <p:spTree>
@@ -6226,6 +6363,182 @@
 </p:sld>
 </file>
 
+<file path=ppt/slides/slide17.xml><?xml version="1.0" encoding="utf-8"?>
+<p:sld xmlns:a="http://schemas.openxmlformats.org/drawingml/2006/main" xmlns:r="http://schemas.openxmlformats.org/officeDocument/2006/relationships" xmlns:p="http://schemas.openxmlformats.org/presentationml/2006/main">
+  <p:cSld>
+    <p:spTree>
+      <p:nvGrpSpPr>
+        <p:cNvPr id="1" name=""/>
+        <p:cNvGrpSpPr/>
+        <p:nvPr/>
+      </p:nvGrpSpPr>
+      <p:grpSpPr>
+        <a:xfrm>
+          <a:off x="0" y="0"/>
+          <a:ext cx="0" cy="0"/>
+          <a:chOff x="0" y="0"/>
+          <a:chExt cx="0" cy="0"/>
+        </a:xfrm>
+      </p:grpSpPr>
+      <p:sp>
+        <p:nvSpPr>
+          <p:cNvPr id="2" name="Заголовок 1">
+            <a:extLst>
+              <a:ext uri="{FF2B5EF4-FFF2-40B4-BE49-F238E27FC236}">
+                <a16:creationId xmlns:a16="http://schemas.microsoft.com/office/drawing/2014/main" id="{509A1AFA-B52E-AAC1-5362-C8C5937FCF94}"/>
+              </a:ext>
+            </a:extLst>
+          </p:cNvPr>
+          <p:cNvSpPr>
+            <a:spLocks noGrp="1"/>
+          </p:cNvSpPr>
+          <p:nvPr>
+            <p:ph type="title"/>
+          </p:nvPr>
+        </p:nvSpPr>
+        <p:spPr/>
+        <p:txBody>
+          <a:bodyPr/>
+          <a:lstStyle/>
+          <a:p>
+            <a:r>
+              <a:rPr lang="ru-RU" dirty="0"/>
+              <a:t>Итоги</a:t>
+            </a:r>
+          </a:p>
+        </p:txBody>
+      </p:sp>
+      <p:sp>
+        <p:nvSpPr>
+          <p:cNvPr id="3" name="Объект 2">
+            <a:extLst>
+              <a:ext uri="{FF2B5EF4-FFF2-40B4-BE49-F238E27FC236}">
+                <a16:creationId xmlns:a16="http://schemas.microsoft.com/office/drawing/2014/main" id="{F4876358-A7C0-AF3E-9723-1EE9F01FCA00}"/>
+              </a:ext>
+            </a:extLst>
+          </p:cNvPr>
+          <p:cNvSpPr>
+            <a:spLocks noGrp="1"/>
+          </p:cNvSpPr>
+          <p:nvPr>
+            <p:ph idx="1"/>
+          </p:nvPr>
+        </p:nvSpPr>
+        <p:spPr/>
+        <p:txBody>
+          <a:bodyPr/>
+          <a:lstStyle/>
+          <a:p>
+            <a:r>
+              <a:rPr lang="ru-RU" dirty="0"/>
+              <a:t>Модификатор доступа можно указать ТОЛЬКО для ОДНОГО </a:t>
+            </a:r>
+            <a:r>
+              <a:rPr lang="ru-RU" dirty="0" err="1"/>
+              <a:t>аксессора</a:t>
+            </a:r>
+            <a:r>
+              <a:rPr lang="ru-RU" dirty="0"/>
+              <a:t> (</a:t>
+            </a:r>
+            <a:r>
+              <a:rPr lang="ru-RU" dirty="0" err="1"/>
+              <a:t>get</a:t>
+            </a:r>
+            <a:r>
+              <a:rPr lang="ru-RU" dirty="0"/>
+              <a:t> или </a:t>
+            </a:r>
+            <a:r>
+              <a:rPr lang="ru-RU" dirty="0" err="1"/>
+              <a:t>set</a:t>
+            </a:r>
+            <a:r>
+              <a:rPr lang="ru-RU" dirty="0"/>
+              <a:t>)</a:t>
+            </a:r>
+          </a:p>
+          <a:p>
+            <a:r>
+              <a:rPr lang="ru-RU" dirty="0"/>
+              <a:t>Этот модификатор должен быть СТРОЖЕ, чем у самого свойства</a:t>
+            </a:r>
+          </a:p>
+          <a:p>
+            <a:r>
+              <a:rPr lang="ru-RU" dirty="0"/>
+              <a:t>Авто-свойства не могут быть только </a:t>
+            </a:r>
+            <a:r>
+              <a:rPr lang="ru-RU" dirty="0" err="1"/>
+              <a:t>set</a:t>
+            </a:r>
+            <a:r>
+              <a:rPr lang="ru-RU" dirty="0"/>
+              <a:t> (нужен хотя бы </a:t>
+            </a:r>
+            <a:r>
+              <a:rPr lang="ru-RU" dirty="0" err="1"/>
+              <a:t>get</a:t>
+            </a:r>
+            <a:r>
+              <a:rPr lang="ru-RU" dirty="0"/>
+              <a:t>) </a:t>
+            </a:r>
+          </a:p>
+          <a:p>
+            <a:r>
+              <a:rPr lang="ru-RU" dirty="0"/>
+              <a:t>Если нужны оба приватные — </a:t>
+            </a:r>
+            <a:r>
+              <a:rPr lang="ru-RU" dirty="0" err="1"/>
+              <a:t>private</a:t>
+            </a:r>
+            <a:r>
+              <a:rPr lang="ru-RU" dirty="0"/>
+              <a:t> </a:t>
+            </a:r>
+            <a:r>
+              <a:rPr lang="ru-RU" dirty="0" err="1"/>
+              <a:t>string</a:t>
+            </a:r>
+            <a:r>
+              <a:rPr lang="ru-RU" dirty="0"/>
+              <a:t> Name { </a:t>
+            </a:r>
+            <a:r>
+              <a:rPr lang="ru-RU" dirty="0" err="1"/>
+              <a:t>get</a:t>
+            </a:r>
+            <a:r>
+              <a:rPr lang="ru-RU" dirty="0"/>
+              <a:t>; </a:t>
+            </a:r>
+            <a:r>
+              <a:rPr lang="ru-RU" dirty="0" err="1"/>
+              <a:t>set</a:t>
+            </a:r>
+            <a:r>
+              <a:rPr lang="ru-RU" dirty="0"/>
+              <a:t>; }</a:t>
+            </a:r>
+          </a:p>
+        </p:txBody>
+      </p:sp>
+    </p:spTree>
+    <p:extLst>
+      <p:ext uri="{BB962C8B-B14F-4D97-AF65-F5344CB8AC3E}">
+        <p14:creationId xmlns:p14="http://schemas.microsoft.com/office/powerpoint/2010/main" val="3892276639"/>
+      </p:ext>
+    </p:extLst>
+  </p:cSld>
+  <p:clrMapOvr>
+    <a:masterClrMapping/>
+  </p:clrMapOvr>
+</p:sld>
+</file>
+
 <file path=ppt/slides/slide18.xml><?xml version="1.0" encoding="utf-8"?>
 <p:sld xmlns:a="http://schemas.openxmlformats.org/drawingml/2006/main" xmlns:r="http://schemas.openxmlformats.org/officeDocument/2006/relationships" xmlns:p="http://schemas.openxmlformats.org/presentationml/2006/main">
   <p:cSld>
@@ -6234,7 +6547,7 @@
         <p:cNvPr id="1" name="">
           <a:extLst>
             <a:ext uri="{FF2B5EF4-FFF2-40B4-BE49-F238E27FC236}">
-              <a16:creationId xmlns:a16="http://schemas.microsoft.com/office/drawing/2014/main" id="{78807EF7-DC3D-1625-3241-A0BE385B4F26}"/>
+              <a16:creationId xmlns:a16="http://schemas.microsoft.com/office/drawing/2014/main" id="{C8749906-6E75-79CD-AC6D-543F5C2A3E0E}"/>
             </a:ext>
           </a:extLst>
         </p:cNvPr>
@@ -6254,7 +6567,7 @@
           <p:cNvPr id="2" name="Заголовок 1">
             <a:extLst>
               <a:ext uri="{FF2B5EF4-FFF2-40B4-BE49-F238E27FC236}">
-                <a16:creationId xmlns:a16="http://schemas.microsoft.com/office/drawing/2014/main" id="{DF831158-4643-C43E-7556-D253B178EB98}"/>
+                <a16:creationId xmlns:a16="http://schemas.microsoft.com/office/drawing/2014/main" id="{F8CB28F1-7B53-6B8E-0D74-71A9253398EE}"/>
               </a:ext>
             </a:extLst>
           </p:cNvPr>
@@ -6270,7 +6583,14 @@
           <a:bodyPr/>
           <a:lstStyle/>
           <a:p>
-            <a:endParaRPr lang="ru-RU"/>
+            <a:r>
+              <a:rPr lang="en-US" dirty="0"/>
+              <a:t>5. </a:t>
+            </a:r>
+            <a:r>
+              <a:rPr lang="ru-RU" dirty="0"/>
+              <a:t>Замена поля-массива объектом</a:t>
+            </a:r>
           </a:p>
         </p:txBody>
       </p:sp>
@@ -6279,7 +6599,7 @@
           <p:cNvPr id="3" name="Объект 2">
             <a:extLst>
               <a:ext uri="{FF2B5EF4-FFF2-40B4-BE49-F238E27FC236}">
-                <a16:creationId xmlns:a16="http://schemas.microsoft.com/office/drawing/2014/main" id="{06D16399-E808-8E76-FDDE-E3D9A3D9E1EA}"/>
+                <a16:creationId xmlns:a16="http://schemas.microsoft.com/office/drawing/2014/main" id="{2EF23C97-FF66-009E-13D2-1604A1EA593D}"/>
               </a:ext>
             </a:extLst>
           </p:cNvPr>
@@ -6295,44 +6615,14 @@
           <a:bodyPr/>
           <a:lstStyle/>
           <a:p>
-            <a:endParaRPr lang="ru-RU"/>
-          </a:p>
-        </p:txBody>
-      </p:sp>
-      <p:pic>
-        <p:nvPicPr>
-          <p:cNvPr id="5" name="Рисунок 4">
-            <a:extLst>
-              <a:ext uri="{FF2B5EF4-FFF2-40B4-BE49-F238E27FC236}">
-                <a16:creationId xmlns:a16="http://schemas.microsoft.com/office/drawing/2014/main" id="{8B854BD9-DDDE-C523-A298-3FEE59B1C47D}"/>
-              </a:ext>
-            </a:extLst>
-          </p:cNvPr>
-          <p:cNvPicPr>
-            <a:picLocks noChangeAspect="1"/>
-          </p:cNvPicPr>
-          <p:nvPr/>
-        </p:nvPicPr>
-        <p:blipFill>
-          <a:blip r:embed="rId2"/>
-          <a:stretch>
-            <a:fillRect/>
-          </a:stretch>
-        </p:blipFill>
-        <p:spPr>
-          <a:xfrm>
-            <a:off x="1623388" y="1747603"/>
-            <a:ext cx="8945223" cy="3362794"/>
-          </a:xfrm>
-          <a:prstGeom prst="rect">
-            <a:avLst/>
-          </a:prstGeom>
-        </p:spPr>
-      </p:pic>
+            <a:endParaRPr lang="ru-RU" dirty="0"/>
+          </a:p>
+        </p:txBody>
+      </p:sp>
     </p:spTree>
     <p:extLst>
       <p:ext uri="{BB962C8B-B14F-4D97-AF65-F5344CB8AC3E}">
-        <p14:creationId xmlns:p14="http://schemas.microsoft.com/office/powerpoint/2010/main" val="3033447990"/>
+        <p14:creationId xmlns:p14="http://schemas.microsoft.com/office/powerpoint/2010/main" val="3276868637"/>
       </p:ext>
     </p:extLst>
   </p:cSld>
@@ -6364,7 +6654,7 @@
           <p:cNvPr id="2" name="Заголовок 1">
             <a:extLst>
               <a:ext uri="{FF2B5EF4-FFF2-40B4-BE49-F238E27FC236}">
-                <a16:creationId xmlns:a16="http://schemas.microsoft.com/office/drawing/2014/main" id="{509A1AFA-B52E-AAC1-5362-C8C5937FCF94}"/>
+                <a16:creationId xmlns:a16="http://schemas.microsoft.com/office/drawing/2014/main" id="{0CC15DA4-C727-8670-2B0F-654A5E127474}"/>
               </a:ext>
             </a:extLst>
           </p:cNvPr>
@@ -6382,7 +6672,7 @@
           <a:p>
             <a:r>
               <a:rPr lang="ru-RU" dirty="0"/>
-              <a:t>Итоги</a:t>
+              <a:t>6. Замена простого поля объектом</a:t>
             </a:r>
           </a:p>
         </p:txBody>
@@ -6392,7 +6682,7 @@
           <p:cNvPr id="3" name="Объект 2">
             <a:extLst>
               <a:ext uri="{FF2B5EF4-FFF2-40B4-BE49-F238E27FC236}">
-                <a16:creationId xmlns:a16="http://schemas.microsoft.com/office/drawing/2014/main" id="{F4876358-A7C0-AF3E-9723-1EE9F01FCA00}"/>
+                <a16:creationId xmlns:a16="http://schemas.microsoft.com/office/drawing/2014/main" id="{177D01CE-F7FE-B1A0-2D7B-1062DF8698E9}"/>
               </a:ext>
             </a:extLst>
           </p:cNvPr>
@@ -6403,104 +6693,27 @@
             <p:ph idx="1"/>
           </p:nvPr>
         </p:nvSpPr>
-        <p:spPr/>
+        <p:spPr>
+          <a:xfrm>
+            <a:off x="1451580" y="2015732"/>
+            <a:ext cx="4915354" cy="3450613"/>
+          </a:xfrm>
+        </p:spPr>
         <p:txBody>
           <a:bodyPr/>
           <a:lstStyle/>
           <a:p>
             <a:r>
               <a:rPr lang="ru-RU" dirty="0"/>
-              <a:t>Модификатор доступа можно указать ТОЛЬКО для ОДНОГО </a:t>
+              <a:t>Суть: Нужно иметь какой-то список или расширяемый объект (настройки и </a:t>
             </a:r>
             <a:r>
               <a:rPr lang="ru-RU" dirty="0" err="1"/>
-              <a:t>аксессора</a:t>
+              <a:t>тд</a:t>
             </a:r>
             <a:r>
               <a:rPr lang="ru-RU" dirty="0"/>
-              <a:t> (</a:t>
-            </a:r>
-            <a:r>
-              <a:rPr lang="ru-RU" dirty="0" err="1"/>
-              <a:t>get</a:t>
-            </a:r>
-            <a:r>
-              <a:rPr lang="ru-RU" dirty="0"/>
-              <a:t> или </a:t>
-            </a:r>
-            <a:r>
-              <a:rPr lang="ru-RU" dirty="0" err="1"/>
-              <a:t>set</a:t>
-            </a:r>
-            <a:r>
-              <a:rPr lang="ru-RU" dirty="0"/>
-              <a:t>)</a:t>
-            </a:r>
-          </a:p>
-          <a:p>
-            <a:r>
-              <a:rPr lang="ru-RU" dirty="0"/>
-              <a:t>Этот модификатор должен быть СТРОЖЕ, чем у самого свойства</a:t>
-            </a:r>
-          </a:p>
-          <a:p>
-            <a:r>
-              <a:rPr lang="ru-RU" dirty="0"/>
-              <a:t>Авто-свойства не могут быть только </a:t>
-            </a:r>
-            <a:r>
-              <a:rPr lang="ru-RU" dirty="0" err="1"/>
-              <a:t>set</a:t>
-            </a:r>
-            <a:r>
-              <a:rPr lang="ru-RU" dirty="0"/>
-              <a:t> (нужен хотя бы </a:t>
-            </a:r>
-            <a:r>
-              <a:rPr lang="ru-RU" dirty="0" err="1"/>
-              <a:t>get</a:t>
-            </a:r>
-            <a:r>
-              <a:rPr lang="ru-RU" dirty="0"/>
-              <a:t>) </a:t>
-            </a:r>
-          </a:p>
-          <a:p>
-            <a:r>
-              <a:rPr lang="ru-RU" dirty="0"/>
-              <a:t>Если нужны оба приватные — </a:t>
-            </a:r>
-            <a:r>
-              <a:rPr lang="ru-RU" dirty="0" err="1"/>
-              <a:t>private</a:t>
-            </a:r>
-            <a:r>
-              <a:rPr lang="ru-RU" dirty="0"/>
-              <a:t> </a:t>
-            </a:r>
-            <a:r>
-              <a:rPr lang="ru-RU" dirty="0" err="1"/>
-              <a:t>string</a:t>
-            </a:r>
-            <a:r>
-              <a:rPr lang="ru-RU" dirty="0"/>
-              <a:t> Name { </a:t>
-            </a:r>
-            <a:r>
-              <a:rPr lang="ru-RU" dirty="0" err="1"/>
-              <a:t>get</a:t>
-            </a:r>
-            <a:r>
-              <a:rPr lang="ru-RU" dirty="0"/>
-              <a:t>; </a:t>
-            </a:r>
-            <a:r>
-              <a:rPr lang="ru-RU" dirty="0" err="1"/>
-              <a:t>set</a:t>
-            </a:r>
-            <a:r>
-              <a:rPr lang="ru-RU" dirty="0"/>
-              <a:t>; }</a:t>
+              <a:t>), который в себе может содержать свойства так же, как и первоначальная сущность</a:t>
             </a:r>
           </a:p>
         </p:txBody>
@@ -6508,7 +6721,7 @@
     </p:spTree>
     <p:extLst>
       <p:ext uri="{BB962C8B-B14F-4D97-AF65-F5344CB8AC3E}">
-        <p14:creationId xmlns:p14="http://schemas.microsoft.com/office/powerpoint/2010/main" val="3892276639"/>
+        <p14:creationId xmlns:p14="http://schemas.microsoft.com/office/powerpoint/2010/main" val="342029362"/>
       </p:ext>
     </p:extLst>
   </p:cSld>
@@ -6523,160 +6736,10 @@
   <p:cSld>
     <p:spTree>
       <p:nvGrpSpPr>
-        <p:cNvPr id="1" name=""/>
-        <p:cNvGrpSpPr/>
-        <p:nvPr/>
-      </p:nvGrpSpPr>
-      <p:grpSpPr>
-        <a:xfrm>
-          <a:off x="0" y="0"/>
-          <a:ext cx="0" cy="0"/>
-          <a:chOff x="0" y="0"/>
-          <a:chExt cx="0" cy="0"/>
-        </a:xfrm>
-      </p:grpSpPr>
-      <p:sp>
-        <p:nvSpPr>
-          <p:cNvPr id="2" name="Заголовок 1">
-            <a:extLst>
-              <a:ext uri="{FF2B5EF4-FFF2-40B4-BE49-F238E27FC236}">
-                <a16:creationId xmlns:a16="http://schemas.microsoft.com/office/drawing/2014/main" id="{98E6CC54-1438-A64F-953C-EE135354C188}"/>
-              </a:ext>
-            </a:extLst>
-          </p:cNvPr>
-          <p:cNvSpPr>
-            <a:spLocks noGrp="1"/>
-          </p:cNvSpPr>
-          <p:nvPr>
-            <p:ph type="title"/>
-          </p:nvPr>
-        </p:nvSpPr>
-        <p:spPr/>
-        <p:txBody>
-          <a:bodyPr/>
-          <a:lstStyle/>
-          <a:p>
-            <a:r>
-              <a:rPr lang="ru-RU" dirty="0"/>
-              <a:t>Введение</a:t>
-            </a:r>
-          </a:p>
-        </p:txBody>
-      </p:sp>
-      <p:sp>
-        <p:nvSpPr>
-          <p:cNvPr id="3" name="Объект 2">
-            <a:extLst>
-              <a:ext uri="{FF2B5EF4-FFF2-40B4-BE49-F238E27FC236}">
-                <a16:creationId xmlns:a16="http://schemas.microsoft.com/office/drawing/2014/main" id="{22FFE0D1-4432-3739-4D53-40DAE9B2B9B9}"/>
-              </a:ext>
-            </a:extLst>
-          </p:cNvPr>
-          <p:cNvSpPr>
-            <a:spLocks noGrp="1"/>
-          </p:cNvSpPr>
-          <p:nvPr>
-            <p:ph idx="1"/>
-          </p:nvPr>
-        </p:nvSpPr>
-        <p:spPr>
-          <a:xfrm>
-            <a:off x="508001" y="1570567"/>
-            <a:ext cx="6720417" cy="4229099"/>
-          </a:xfrm>
-        </p:spPr>
-        <p:txBody>
-          <a:bodyPr/>
-          <a:lstStyle/>
-          <a:p>
-            <a:endParaRPr lang="ru-RU" i="1" dirty="0"/>
-          </a:p>
-          <a:p>
-            <a:r>
-              <a:rPr lang="ru-RU" dirty="0"/>
-              <a:t>"Плохой код делает одно и то же в сотне мест. </a:t>
-            </a:r>
-            <a:r>
-              <a:rPr lang="en-US" dirty="0"/>
-              <a:t> </a:t>
-            </a:r>
-            <a:r>
-              <a:rPr lang="ru-RU" dirty="0"/>
-              <a:t>Хороший код делает это один раз и правильно.“</a:t>
-            </a:r>
-            <a:endParaRPr lang="en-US" dirty="0"/>
-          </a:p>
-          <a:p>
-            <a:pPr marL="0" indent="0">
-              <a:buNone/>
-            </a:pPr>
-            <a:r>
-              <a:rPr lang="en-US" i="1" dirty="0"/>
-              <a:t>    https://habr.com/ru/companies/beeline_tech/articles/731706/</a:t>
-            </a:r>
-            <a:endParaRPr lang="ru-RU" i="1" dirty="0"/>
-          </a:p>
-          <a:p>
-            <a:r>
-              <a:rPr lang="ru-RU" i="1" dirty="0"/>
-              <a:t>Повышение качества кода через правильную работу с данными</a:t>
-            </a:r>
-            <a:endParaRPr lang="ru-RU" dirty="0"/>
-          </a:p>
-        </p:txBody>
-      </p:sp>
-      <p:pic>
-        <p:nvPicPr>
-          <p:cNvPr id="5" name="Рисунок 4">
-            <a:extLst>
-              <a:ext uri="{FF2B5EF4-FFF2-40B4-BE49-F238E27FC236}">
-                <a16:creationId xmlns:a16="http://schemas.microsoft.com/office/drawing/2014/main" id="{7C4BD8AD-6088-6AD1-AC5E-4EFCC40177F5}"/>
-              </a:ext>
-            </a:extLst>
-          </p:cNvPr>
-          <p:cNvPicPr>
-            <a:picLocks noChangeAspect="1"/>
-          </p:cNvPicPr>
-          <p:nvPr/>
-        </p:nvPicPr>
-        <p:blipFill>
-          <a:blip r:embed="rId2"/>
-          <a:stretch>
-            <a:fillRect/>
-          </a:stretch>
-        </p:blipFill>
-        <p:spPr>
-          <a:xfrm>
-            <a:off x="7355418" y="1456267"/>
-            <a:ext cx="3973689" cy="2879050"/>
-          </a:xfrm>
-          <a:prstGeom prst="rect">
-            <a:avLst/>
-          </a:prstGeom>
-        </p:spPr>
-      </p:pic>
-    </p:spTree>
-    <p:extLst>
-      <p:ext uri="{BB962C8B-B14F-4D97-AF65-F5344CB8AC3E}">
-        <p14:creationId xmlns:p14="http://schemas.microsoft.com/office/powerpoint/2010/main" val="536533876"/>
-      </p:ext>
-    </p:extLst>
-  </p:cSld>
-  <p:clrMapOvr>
-    <a:masterClrMapping/>
-  </p:clrMapOvr>
-</p:sld>
-</file>
-
-<file path=ppt/slides/slide20.xml><?xml version="1.0" encoding="utf-8"?>
-<p:sld xmlns:a="http://schemas.openxmlformats.org/drawingml/2006/main" xmlns:r="http://schemas.openxmlformats.org/officeDocument/2006/relationships" xmlns:p="http://schemas.openxmlformats.org/presentationml/2006/main">
-  <p:cSld>
-    <p:spTree>
-      <p:nvGrpSpPr>
         <p:cNvPr id="1" name="">
           <a:extLst>
             <a:ext uri="{FF2B5EF4-FFF2-40B4-BE49-F238E27FC236}">
-              <a16:creationId xmlns:a16="http://schemas.microsoft.com/office/drawing/2014/main" id="{C8749906-6E75-79CD-AC6D-543F5C2A3E0E}"/>
+              <a16:creationId xmlns:a16="http://schemas.microsoft.com/office/drawing/2014/main" id="{F34A7F00-B3BB-0244-44AB-AB9E1C37366A}"/>
             </a:ext>
           </a:extLst>
         </p:cNvPr>
@@ -6696,7 +6759,7 @@
           <p:cNvPr id="2" name="Заголовок 1">
             <a:extLst>
               <a:ext uri="{FF2B5EF4-FFF2-40B4-BE49-F238E27FC236}">
-                <a16:creationId xmlns:a16="http://schemas.microsoft.com/office/drawing/2014/main" id="{F8CB28F1-7B53-6B8E-0D74-71A9253398EE}"/>
+                <a16:creationId xmlns:a16="http://schemas.microsoft.com/office/drawing/2014/main" id="{9B53D772-1DA5-BEBC-2DFE-AC5D110098C2}"/>
               </a:ext>
             </a:extLst>
           </p:cNvPr>
@@ -6713,12 +6776,8 @@
           <a:lstStyle/>
           <a:p>
             <a:r>
-              <a:rPr lang="en-US" dirty="0"/>
-              <a:t>5. </a:t>
-            </a:r>
-            <a:r>
               <a:rPr lang="ru-RU" dirty="0"/>
-              <a:t>Замена поля-массива объектом</a:t>
+              <a:t>Структура презентации</a:t>
             </a:r>
           </a:p>
         </p:txBody>
@@ -6728,7 +6787,7 @@
           <p:cNvPr id="3" name="Объект 2">
             <a:extLst>
               <a:ext uri="{FF2B5EF4-FFF2-40B4-BE49-F238E27FC236}">
-                <a16:creationId xmlns:a16="http://schemas.microsoft.com/office/drawing/2014/main" id="{2EF23C97-FF66-009E-13D2-1604A1EA593D}"/>
+                <a16:creationId xmlns:a16="http://schemas.microsoft.com/office/drawing/2014/main" id="{FCFBE660-DA77-8616-D05B-448C87854D86}"/>
               </a:ext>
             </a:extLst>
           </p:cNvPr>
@@ -6744,14 +6803,20 @@
           <a:bodyPr/>
           <a:lstStyle/>
           <a:p>
-            <a:endParaRPr lang="ru-RU"/>
+            <a:r>
+              <a:rPr lang="ru-RU" dirty="0"/>
+              <a:t>Я буду показывать рабочие примеры задач, которые будут решать разные программисты (опытный и неопытный) с объяснениями на примерах (будут и свои)</a:t>
+            </a:r>
+          </a:p>
+          <a:p>
+            <a:endParaRPr lang="ru-RU" dirty="0"/>
           </a:p>
         </p:txBody>
       </p:sp>
     </p:spTree>
     <p:extLst>
       <p:ext uri="{BB962C8B-B14F-4D97-AF65-F5344CB8AC3E}">
-        <p14:creationId xmlns:p14="http://schemas.microsoft.com/office/powerpoint/2010/main" val="3276868637"/>
+        <p14:creationId xmlns:p14="http://schemas.microsoft.com/office/powerpoint/2010/main" val="1773021652"/>
       </p:ext>
     </p:extLst>
   </p:cSld>
@@ -6761,100 +6826,7 @@
 </p:sld>
 </file>
 
-<file path=ppt/slides/slide21.xml><?xml version="1.0" encoding="utf-8"?>
-<p:sld xmlns:a="http://schemas.openxmlformats.org/drawingml/2006/main" xmlns:r="http://schemas.openxmlformats.org/officeDocument/2006/relationships" xmlns:p="http://schemas.openxmlformats.org/presentationml/2006/main">
-  <p:cSld>
-    <p:spTree>
-      <p:nvGrpSpPr>
-        <p:cNvPr id="1" name="">
-          <a:extLst>
-            <a:ext uri="{FF2B5EF4-FFF2-40B4-BE49-F238E27FC236}">
-              <a16:creationId xmlns:a16="http://schemas.microsoft.com/office/drawing/2014/main" id="{4F6A1626-BA4D-23F1-2F61-B22688254CBB}"/>
-            </a:ext>
-          </a:extLst>
-        </p:cNvPr>
-        <p:cNvGrpSpPr/>
-        <p:nvPr/>
-      </p:nvGrpSpPr>
-      <p:grpSpPr>
-        <a:xfrm>
-          <a:off x="0" y="0"/>
-          <a:ext cx="0" cy="0"/>
-          <a:chOff x="0" y="0"/>
-          <a:chExt cx="0" cy="0"/>
-        </a:xfrm>
-      </p:grpSpPr>
-      <p:sp>
-        <p:nvSpPr>
-          <p:cNvPr id="2" name="Заголовок 1">
-            <a:extLst>
-              <a:ext uri="{FF2B5EF4-FFF2-40B4-BE49-F238E27FC236}">
-                <a16:creationId xmlns:a16="http://schemas.microsoft.com/office/drawing/2014/main" id="{7F902DBB-D55A-3D06-FCF9-28A189B44B53}"/>
-              </a:ext>
-            </a:extLst>
-          </p:cNvPr>
-          <p:cNvSpPr>
-            <a:spLocks noGrp="1"/>
-          </p:cNvSpPr>
-          <p:nvPr>
-            <p:ph type="title"/>
-          </p:nvPr>
-        </p:nvSpPr>
-        <p:spPr/>
-        <p:txBody>
-          <a:bodyPr/>
-          <a:lstStyle/>
-          <a:p>
-            <a:r>
-              <a:rPr lang="en-US" dirty="0"/>
-              <a:t>6. </a:t>
-            </a:r>
-            <a:r>
-              <a:rPr lang="ru-RU" dirty="0"/>
-              <a:t>Замена простого поля объектом</a:t>
-            </a:r>
-          </a:p>
-        </p:txBody>
-      </p:sp>
-      <p:sp>
-        <p:nvSpPr>
-          <p:cNvPr id="3" name="Объект 2">
-            <a:extLst>
-              <a:ext uri="{FF2B5EF4-FFF2-40B4-BE49-F238E27FC236}">
-                <a16:creationId xmlns:a16="http://schemas.microsoft.com/office/drawing/2014/main" id="{A10F7BBF-746E-2128-D3AB-48BA95065D36}"/>
-              </a:ext>
-            </a:extLst>
-          </p:cNvPr>
-          <p:cNvSpPr>
-            <a:spLocks noGrp="1"/>
-          </p:cNvSpPr>
-          <p:nvPr>
-            <p:ph idx="1"/>
-          </p:nvPr>
-        </p:nvSpPr>
-        <p:spPr/>
-        <p:txBody>
-          <a:bodyPr/>
-          <a:lstStyle/>
-          <a:p>
-            <a:endParaRPr lang="ru-RU"/>
-          </a:p>
-        </p:txBody>
-      </p:sp>
-    </p:spTree>
-    <p:extLst>
-      <p:ext uri="{BB962C8B-B14F-4D97-AF65-F5344CB8AC3E}">
-        <p14:creationId xmlns:p14="http://schemas.microsoft.com/office/powerpoint/2010/main" val="3597752665"/>
-      </p:ext>
-    </p:extLst>
-  </p:cSld>
-  <p:clrMapOvr>
-    <a:masterClrMapping/>
-  </p:clrMapOvr>
-</p:sld>
-</file>
-
-<file path=ppt/slides/slide22.xml><?xml version="1.0" encoding="utf-8"?>
+<file path=ppt/slides/slide20.xml><?xml version="1.0" encoding="utf-8"?>
 <p:sld xmlns:a="http://schemas.openxmlformats.org/drawingml/2006/main" xmlns:r="http://schemas.openxmlformats.org/officeDocument/2006/relationships" xmlns:p="http://schemas.openxmlformats.org/presentationml/2006/main">
   <p:cSld>
     <p:spTree>
@@ -6898,35 +6870,72 @@
           <a:bodyPr/>
           <a:lstStyle/>
           <a:p>
-            <a:endParaRPr lang="ru-RU"/>
-          </a:p>
-        </p:txBody>
-      </p:sp>
-      <p:sp>
-        <p:nvSpPr>
-          <p:cNvPr id="3" name="Объект 2">
+            <a:endParaRPr lang="ru-RU" dirty="0"/>
+          </a:p>
+        </p:txBody>
+      </p:sp>
+      <p:pic>
+        <p:nvPicPr>
+          <p:cNvPr id="5" name="Объект 4">
             <a:extLst>
               <a:ext uri="{FF2B5EF4-FFF2-40B4-BE49-F238E27FC236}">
-                <a16:creationId xmlns:a16="http://schemas.microsoft.com/office/drawing/2014/main" id="{456C0D68-DED6-566F-CB50-0CF965B7F125}"/>
+                <a16:creationId xmlns:a16="http://schemas.microsoft.com/office/drawing/2014/main" id="{83F6C19E-E4ED-EE99-99DC-9A895F1E8C63}"/>
               </a:ext>
             </a:extLst>
           </p:cNvPr>
-          <p:cNvSpPr>
-            <a:spLocks noGrp="1"/>
-          </p:cNvSpPr>
+          <p:cNvPicPr>
+            <a:picLocks noGrp="1" noChangeAspect="1"/>
+          </p:cNvPicPr>
           <p:nvPr>
             <p:ph idx="1"/>
           </p:nvPr>
-        </p:nvSpPr>
-        <p:spPr/>
-        <p:txBody>
-          <a:bodyPr/>
-          <a:lstStyle/>
-          <a:p>
-            <a:endParaRPr lang="ru-RU"/>
-          </a:p>
-        </p:txBody>
-      </p:sp>
+        </p:nvPicPr>
+        <p:blipFill>
+          <a:blip r:embed="rId2"/>
+          <a:stretch>
+            <a:fillRect/>
+          </a:stretch>
+        </p:blipFill>
+        <p:spPr>
+          <a:xfrm>
+            <a:off x="121340" y="128935"/>
+            <a:ext cx="5426564" cy="3449638"/>
+          </a:xfrm>
+          <a:prstGeom prst="rect">
+            <a:avLst/>
+          </a:prstGeom>
+        </p:spPr>
+      </p:pic>
+      <p:pic>
+        <p:nvPicPr>
+          <p:cNvPr id="6" name="Рисунок 5">
+            <a:extLst>
+              <a:ext uri="{FF2B5EF4-FFF2-40B4-BE49-F238E27FC236}">
+                <a16:creationId xmlns:a16="http://schemas.microsoft.com/office/drawing/2014/main" id="{AB6283F3-4EBC-F595-E79C-E95045D6F3B1}"/>
+              </a:ext>
+            </a:extLst>
+          </p:cNvPr>
+          <p:cNvPicPr>
+            <a:picLocks noChangeAspect="1"/>
+          </p:cNvPicPr>
+          <p:nvPr/>
+        </p:nvPicPr>
+        <p:blipFill>
+          <a:blip r:embed="rId3"/>
+          <a:stretch>
+            <a:fillRect/>
+          </a:stretch>
+        </p:blipFill>
+        <p:spPr>
+          <a:xfrm>
+            <a:off x="4622231" y="2243666"/>
+            <a:ext cx="6914415" cy="4199727"/>
+          </a:xfrm>
+          <a:prstGeom prst="rect">
+            <a:avLst/>
+          </a:prstGeom>
+        </p:spPr>
+      </p:pic>
     </p:spTree>
     <p:extLst>
       <p:ext uri="{BB962C8B-B14F-4D97-AF65-F5344CB8AC3E}">
@@ -6940,7 +6949,237 @@
 </p:sld>
 </file>
 
-<file path=ppt/slides/slide23.xml><?xml version="1.0" encoding="utf-8"?>
+<file path=ppt/slides/slide21.xml><?xml version="1.0" encoding="utf-8"?>
+<p:sld xmlns:a="http://schemas.openxmlformats.org/drawingml/2006/main" xmlns:r="http://schemas.openxmlformats.org/officeDocument/2006/relationships" xmlns:p="http://schemas.openxmlformats.org/presentationml/2006/main">
+  <p:cSld>
+    <p:spTree>
+      <p:nvGrpSpPr>
+        <p:cNvPr id="1" name=""/>
+        <p:cNvGrpSpPr/>
+        <p:nvPr/>
+      </p:nvGrpSpPr>
+      <p:grpSpPr>
+        <a:xfrm>
+          <a:off x="0" y="0"/>
+          <a:ext cx="0" cy="0"/>
+          <a:chOff x="0" y="0"/>
+          <a:chExt cx="0" cy="0"/>
+        </a:xfrm>
+      </p:grpSpPr>
+      <p:sp>
+        <p:nvSpPr>
+          <p:cNvPr id="2" name="Заголовок 1">
+            <a:extLst>
+              <a:ext uri="{FF2B5EF4-FFF2-40B4-BE49-F238E27FC236}">
+                <a16:creationId xmlns:a16="http://schemas.microsoft.com/office/drawing/2014/main" id="{EA12F473-1539-A2BE-D06A-3297D07333FE}"/>
+              </a:ext>
+            </a:extLst>
+          </p:cNvPr>
+          <p:cNvSpPr>
+            <a:spLocks noGrp="1"/>
+          </p:cNvSpPr>
+          <p:nvPr>
+            <p:ph type="title"/>
+          </p:nvPr>
+        </p:nvSpPr>
+        <p:spPr/>
+        <p:txBody>
+          <a:bodyPr/>
+          <a:lstStyle/>
+          <a:p>
+            <a:endParaRPr lang="ru-RU" dirty="0"/>
+          </a:p>
+        </p:txBody>
+      </p:sp>
+      <p:pic>
+        <p:nvPicPr>
+          <p:cNvPr id="7" name="Рисунок 6">
+            <a:extLst>
+              <a:ext uri="{FF2B5EF4-FFF2-40B4-BE49-F238E27FC236}">
+                <a16:creationId xmlns:a16="http://schemas.microsoft.com/office/drawing/2014/main" id="{9770376A-1B2B-8DFA-E874-064714AC078C}"/>
+              </a:ext>
+            </a:extLst>
+          </p:cNvPr>
+          <p:cNvPicPr>
+            <a:picLocks noChangeAspect="1"/>
+          </p:cNvPicPr>
+          <p:nvPr/>
+        </p:nvPicPr>
+        <p:blipFill>
+          <a:blip r:embed="rId2"/>
+          <a:stretch>
+            <a:fillRect/>
+          </a:stretch>
+        </p:blipFill>
+        <p:spPr>
+          <a:xfrm>
+            <a:off x="93132" y="209924"/>
+            <a:ext cx="6366001" cy="3159809"/>
+          </a:xfrm>
+          <a:prstGeom prst="rect">
+            <a:avLst/>
+          </a:prstGeom>
+        </p:spPr>
+      </p:pic>
+      <p:sp>
+        <p:nvSpPr>
+          <p:cNvPr id="11" name="Объект 10">
+            <a:extLst>
+              <a:ext uri="{FF2B5EF4-FFF2-40B4-BE49-F238E27FC236}">
+                <a16:creationId xmlns:a16="http://schemas.microsoft.com/office/drawing/2014/main" id="{3AFEF478-3F23-35A5-5956-3C696229D043}"/>
+              </a:ext>
+            </a:extLst>
+          </p:cNvPr>
+          <p:cNvSpPr>
+            <a:spLocks noGrp="1"/>
+          </p:cNvSpPr>
+          <p:nvPr>
+            <p:ph idx="1"/>
+          </p:nvPr>
+        </p:nvSpPr>
+        <p:spPr/>
+        <p:txBody>
+          <a:bodyPr/>
+          <a:lstStyle/>
+          <a:p>
+            <a:endParaRPr lang="ru-RU" dirty="0"/>
+          </a:p>
+        </p:txBody>
+      </p:sp>
+      <p:pic>
+        <p:nvPicPr>
+          <p:cNvPr id="12" name="Рисунок 11">
+            <a:extLst>
+              <a:ext uri="{FF2B5EF4-FFF2-40B4-BE49-F238E27FC236}">
+                <a16:creationId xmlns:a16="http://schemas.microsoft.com/office/drawing/2014/main" id="{AD381129-ED07-6323-5AE2-788F7D016762}"/>
+              </a:ext>
+            </a:extLst>
+          </p:cNvPr>
+          <p:cNvPicPr>
+            <a:picLocks noChangeAspect="1"/>
+          </p:cNvPicPr>
+          <p:nvPr/>
+        </p:nvPicPr>
+        <p:blipFill>
+          <a:blip r:embed="rId3"/>
+          <a:stretch>
+            <a:fillRect/>
+          </a:stretch>
+        </p:blipFill>
+        <p:spPr>
+          <a:xfrm>
+            <a:off x="330199" y="5307095"/>
+            <a:ext cx="5304503" cy="1492772"/>
+          </a:xfrm>
+          <a:prstGeom prst="rect">
+            <a:avLst/>
+          </a:prstGeom>
+        </p:spPr>
+      </p:pic>
+      <p:pic>
+        <p:nvPicPr>
+          <p:cNvPr id="14" name="Рисунок 13">
+            <a:extLst>
+              <a:ext uri="{FF2B5EF4-FFF2-40B4-BE49-F238E27FC236}">
+                <a16:creationId xmlns:a16="http://schemas.microsoft.com/office/drawing/2014/main" id="{A0CDD534-C058-646F-5344-1B3380CF89E4}"/>
+              </a:ext>
+            </a:extLst>
+          </p:cNvPr>
+          <p:cNvPicPr>
+            <a:picLocks noChangeAspect="1"/>
+          </p:cNvPicPr>
+          <p:nvPr/>
+        </p:nvPicPr>
+        <p:blipFill>
+          <a:blip r:embed="rId4"/>
+          <a:stretch>
+            <a:fillRect/>
+          </a:stretch>
+        </p:blipFill>
+        <p:spPr>
+          <a:xfrm>
+            <a:off x="6777003" y="209924"/>
+            <a:ext cx="4961099" cy="3355890"/>
+          </a:xfrm>
+          <a:prstGeom prst="rect">
+            <a:avLst/>
+          </a:prstGeom>
+        </p:spPr>
+      </p:pic>
+      <p:pic>
+        <p:nvPicPr>
+          <p:cNvPr id="16" name="Рисунок 15">
+            <a:extLst>
+              <a:ext uri="{FF2B5EF4-FFF2-40B4-BE49-F238E27FC236}">
+                <a16:creationId xmlns:a16="http://schemas.microsoft.com/office/drawing/2014/main" id="{25E16382-D015-D82A-5378-3B0A875E290A}"/>
+              </a:ext>
+            </a:extLst>
+          </p:cNvPr>
+          <p:cNvPicPr>
+            <a:picLocks noChangeAspect="1"/>
+          </p:cNvPicPr>
+          <p:nvPr/>
+        </p:nvPicPr>
+        <p:blipFill>
+          <a:blip r:embed="rId5"/>
+          <a:stretch>
+            <a:fillRect/>
+          </a:stretch>
+        </p:blipFill>
+        <p:spPr>
+          <a:xfrm>
+            <a:off x="6959691" y="3623582"/>
+            <a:ext cx="4595721" cy="3024494"/>
+          </a:xfrm>
+          <a:prstGeom prst="rect">
+            <a:avLst/>
+          </a:prstGeom>
+        </p:spPr>
+      </p:pic>
+      <p:pic>
+        <p:nvPicPr>
+          <p:cNvPr id="18" name="Рисунок 17">
+            <a:extLst>
+              <a:ext uri="{FF2B5EF4-FFF2-40B4-BE49-F238E27FC236}">
+                <a16:creationId xmlns:a16="http://schemas.microsoft.com/office/drawing/2014/main" id="{9DEF1184-FAB9-D8F8-FFAE-8D4B1E13A51B}"/>
+              </a:ext>
+            </a:extLst>
+          </p:cNvPr>
+          <p:cNvPicPr>
+            <a:picLocks noChangeAspect="1"/>
+          </p:cNvPicPr>
+          <p:nvPr/>
+        </p:nvPicPr>
+        <p:blipFill>
+          <a:blip r:embed="rId6"/>
+          <a:stretch>
+            <a:fillRect/>
+          </a:stretch>
+        </p:blipFill>
+        <p:spPr>
+          <a:xfrm>
+            <a:off x="405479" y="3964328"/>
+            <a:ext cx="5535612" cy="675356"/>
+          </a:xfrm>
+          <a:prstGeom prst="rect">
+            <a:avLst/>
+          </a:prstGeom>
+        </p:spPr>
+      </p:pic>
+    </p:spTree>
+    <p:extLst>
+      <p:ext uri="{BB962C8B-B14F-4D97-AF65-F5344CB8AC3E}">
+        <p14:creationId xmlns:p14="http://schemas.microsoft.com/office/powerpoint/2010/main" val="825722332"/>
+      </p:ext>
+    </p:extLst>
+  </p:cSld>
+  <p:clrMapOvr>
+    <a:masterClrMapping/>
+  </p:clrMapOvr>
+</p:sld>
+</file>
+
+<file path=ppt/slides/slide22.xml><?xml version="1.0" encoding="utf-8"?>
 <p:sld xmlns:a="http://schemas.openxmlformats.org/drawingml/2006/main" xmlns:r="http://schemas.openxmlformats.org/officeDocument/2006/relationships" xmlns:p="http://schemas.openxmlformats.org/presentationml/2006/main">
   <p:cSld>
     <p:spTree>
@@ -6986,7 +7225,7 @@
           <a:p>
             <a:r>
               <a:rPr lang="ru-RU" dirty="0"/>
-              <a:t>Рассматриваемые техники</a:t>
+              <a:t>Рассматриваемые техники (освежим память)</a:t>
             </a:r>
           </a:p>
         </p:txBody>
@@ -7580,167 +7819,7 @@
 </p:sld>
 </file>
 
-<file path=ppt/slides/slide24.xml><?xml version="1.0" encoding="utf-8"?>
-<p:sld xmlns:a="http://schemas.openxmlformats.org/drawingml/2006/main" xmlns:r="http://schemas.openxmlformats.org/officeDocument/2006/relationships" xmlns:p="http://schemas.openxmlformats.org/presentationml/2006/main">
-  <p:cSld>
-    <p:spTree>
-      <p:nvGrpSpPr>
-        <p:cNvPr id="1" name=""/>
-        <p:cNvGrpSpPr/>
-        <p:nvPr/>
-      </p:nvGrpSpPr>
-      <p:grpSpPr>
-        <a:xfrm>
-          <a:off x="0" y="0"/>
-          <a:ext cx="0" cy="0"/>
-          <a:chOff x="0" y="0"/>
-          <a:chExt cx="0" cy="0"/>
-        </a:xfrm>
-      </p:grpSpPr>
-      <p:sp>
-        <p:nvSpPr>
-          <p:cNvPr id="2" name="Заголовок 1">
-            <a:extLst>
-              <a:ext uri="{FF2B5EF4-FFF2-40B4-BE49-F238E27FC236}">
-                <a16:creationId xmlns:a16="http://schemas.microsoft.com/office/drawing/2014/main" id="{0CC15DA4-C727-8670-2B0F-654A5E127474}"/>
-              </a:ext>
-            </a:extLst>
-          </p:cNvPr>
-          <p:cNvSpPr>
-            <a:spLocks noGrp="1"/>
-          </p:cNvSpPr>
-          <p:nvPr>
-            <p:ph type="title"/>
-          </p:nvPr>
-        </p:nvSpPr>
-        <p:spPr/>
-        <p:txBody>
-          <a:bodyPr/>
-          <a:lstStyle/>
-          <a:p>
-            <a:endParaRPr lang="ru-RU"/>
-          </a:p>
-        </p:txBody>
-      </p:sp>
-      <p:sp>
-        <p:nvSpPr>
-          <p:cNvPr id="3" name="Объект 2">
-            <a:extLst>
-              <a:ext uri="{FF2B5EF4-FFF2-40B4-BE49-F238E27FC236}">
-                <a16:creationId xmlns:a16="http://schemas.microsoft.com/office/drawing/2014/main" id="{177D01CE-F7FE-B1A0-2D7B-1062DF8698E9}"/>
-              </a:ext>
-            </a:extLst>
-          </p:cNvPr>
-          <p:cNvSpPr>
-            <a:spLocks noGrp="1"/>
-          </p:cNvSpPr>
-          <p:nvPr>
-            <p:ph idx="1"/>
-          </p:nvPr>
-        </p:nvSpPr>
-        <p:spPr/>
-        <p:txBody>
-          <a:bodyPr/>
-          <a:lstStyle/>
-          <a:p>
-            <a:endParaRPr lang="ru-RU"/>
-          </a:p>
-        </p:txBody>
-      </p:sp>
-    </p:spTree>
-    <p:extLst>
-      <p:ext uri="{BB962C8B-B14F-4D97-AF65-F5344CB8AC3E}">
-        <p14:creationId xmlns:p14="http://schemas.microsoft.com/office/powerpoint/2010/main" val="342029362"/>
-      </p:ext>
-    </p:extLst>
-  </p:cSld>
-  <p:clrMapOvr>
-    <a:masterClrMapping/>
-  </p:clrMapOvr>
-</p:sld>
-</file>
-
-<file path=ppt/slides/slide25.xml><?xml version="1.0" encoding="utf-8"?>
-<p:sld xmlns:a="http://schemas.openxmlformats.org/drawingml/2006/main" xmlns:r="http://schemas.openxmlformats.org/officeDocument/2006/relationships" xmlns:p="http://schemas.openxmlformats.org/presentationml/2006/main">
-  <p:cSld>
-    <p:spTree>
-      <p:nvGrpSpPr>
-        <p:cNvPr id="1" name=""/>
-        <p:cNvGrpSpPr/>
-        <p:nvPr/>
-      </p:nvGrpSpPr>
-      <p:grpSpPr>
-        <a:xfrm>
-          <a:off x="0" y="0"/>
-          <a:ext cx="0" cy="0"/>
-          <a:chOff x="0" y="0"/>
-          <a:chExt cx="0" cy="0"/>
-        </a:xfrm>
-      </p:grpSpPr>
-      <p:sp>
-        <p:nvSpPr>
-          <p:cNvPr id="2" name="Заголовок 1">
-            <a:extLst>
-              <a:ext uri="{FF2B5EF4-FFF2-40B4-BE49-F238E27FC236}">
-                <a16:creationId xmlns:a16="http://schemas.microsoft.com/office/drawing/2014/main" id="{EA12F473-1539-A2BE-D06A-3297D07333FE}"/>
-              </a:ext>
-            </a:extLst>
-          </p:cNvPr>
-          <p:cNvSpPr>
-            <a:spLocks noGrp="1"/>
-          </p:cNvSpPr>
-          <p:nvPr>
-            <p:ph type="title"/>
-          </p:nvPr>
-        </p:nvSpPr>
-        <p:spPr/>
-        <p:txBody>
-          <a:bodyPr/>
-          <a:lstStyle/>
-          <a:p>
-            <a:endParaRPr lang="ru-RU"/>
-          </a:p>
-        </p:txBody>
-      </p:sp>
-      <p:sp>
-        <p:nvSpPr>
-          <p:cNvPr id="3" name="Объект 2">
-            <a:extLst>
-              <a:ext uri="{FF2B5EF4-FFF2-40B4-BE49-F238E27FC236}">
-                <a16:creationId xmlns:a16="http://schemas.microsoft.com/office/drawing/2014/main" id="{B17EBEA2-18E3-37FD-45B1-885AE132C006}"/>
-              </a:ext>
-            </a:extLst>
-          </p:cNvPr>
-          <p:cNvSpPr>
-            <a:spLocks noGrp="1"/>
-          </p:cNvSpPr>
-          <p:nvPr>
-            <p:ph idx="1"/>
-          </p:nvPr>
-        </p:nvSpPr>
-        <p:spPr/>
-        <p:txBody>
-          <a:bodyPr/>
-          <a:lstStyle/>
-          <a:p>
-            <a:endParaRPr lang="ru-RU"/>
-          </a:p>
-        </p:txBody>
-      </p:sp>
-    </p:spTree>
-    <p:extLst>
-      <p:ext uri="{BB962C8B-B14F-4D97-AF65-F5344CB8AC3E}">
-        <p14:creationId xmlns:p14="http://schemas.microsoft.com/office/powerpoint/2010/main" val="825722332"/>
-      </p:ext>
-    </p:extLst>
-  </p:cSld>
-  <p:clrMapOvr>
-    <a:masterClrMapping/>
-  </p:clrMapOvr>
-</p:sld>
-</file>
-
-<file path=ppt/slides/slide26.xml><?xml version="1.0" encoding="utf-8"?>
+<file path=ppt/slides/slide23.xml><?xml version="1.0" encoding="utf-8"?>
 <p:sld xmlns:a="http://schemas.openxmlformats.org/drawingml/2006/main" xmlns:r="http://schemas.openxmlformats.org/officeDocument/2006/relationships" xmlns:p="http://schemas.openxmlformats.org/presentationml/2006/main">
   <p:cSld>
     <p:spTree>
@@ -7825,10 +7904,10 @@
       </p:sp>
       <p:pic>
         <p:nvPicPr>
-          <p:cNvPr id="7" name="Рисунок 6">
+          <p:cNvPr id="11" name="Рисунок 10">
             <a:extLst>
               <a:ext uri="{FF2B5EF4-FFF2-40B4-BE49-F238E27FC236}">
-                <a16:creationId xmlns:a16="http://schemas.microsoft.com/office/drawing/2014/main" id="{53603072-8247-E47F-98FF-54B99598D103}"/>
+                <a16:creationId xmlns:a16="http://schemas.microsoft.com/office/drawing/2014/main" id="{272AD6D7-9FCD-B3B4-3033-44EA2B6F1576}"/>
               </a:ext>
             </a:extLst>
           </p:cNvPr>
@@ -7845,8 +7924,8 @@
         </p:blipFill>
         <p:spPr>
           <a:xfrm>
-            <a:off x="655062" y="2607733"/>
-            <a:ext cx="3597798" cy="4046401"/>
+            <a:off x="5235999" y="2664100"/>
+            <a:ext cx="6845934" cy="3990034"/>
           </a:xfrm>
           <a:prstGeom prst="rect">
             <a:avLst/>
@@ -7855,10 +7934,10 @@
       </p:pic>
       <p:pic>
         <p:nvPicPr>
-          <p:cNvPr id="11" name="Рисунок 10">
+          <p:cNvPr id="5" name="Рисунок 4">
             <a:extLst>
               <a:ext uri="{FF2B5EF4-FFF2-40B4-BE49-F238E27FC236}">
-                <a16:creationId xmlns:a16="http://schemas.microsoft.com/office/drawing/2014/main" id="{272AD6D7-9FCD-B3B4-3033-44EA2B6F1576}"/>
+                <a16:creationId xmlns:a16="http://schemas.microsoft.com/office/drawing/2014/main" id="{31CEF951-B308-6A42-5C28-B582942EFE1E}"/>
               </a:ext>
             </a:extLst>
           </p:cNvPr>
@@ -7875,8 +7954,8 @@
         </p:blipFill>
         <p:spPr>
           <a:xfrm>
-            <a:off x="5235999" y="2664100"/>
-            <a:ext cx="6845934" cy="3990034"/>
+            <a:off x="353682" y="2763438"/>
+            <a:ext cx="4252185" cy="3791357"/>
           </a:xfrm>
           <a:prstGeom prst="rect">
             <a:avLst/>
@@ -7897,6 +7976,165 @@
 </file>
 
 <file path=ppt/slides/slide3.xml><?xml version="1.0" encoding="utf-8"?>
+<p:sld xmlns:a="http://schemas.openxmlformats.org/drawingml/2006/main" xmlns:r="http://schemas.openxmlformats.org/officeDocument/2006/relationships" xmlns:p="http://schemas.openxmlformats.org/presentationml/2006/main">
+  <p:cSld>
+    <p:spTree>
+      <p:nvGrpSpPr>
+        <p:cNvPr id="1" name=""/>
+        <p:cNvGrpSpPr/>
+        <p:nvPr/>
+      </p:nvGrpSpPr>
+      <p:grpSpPr>
+        <a:xfrm>
+          <a:off x="0" y="0"/>
+          <a:ext cx="0" cy="0"/>
+          <a:chOff x="0" y="0"/>
+          <a:chExt cx="0" cy="0"/>
+        </a:xfrm>
+      </p:grpSpPr>
+      <p:sp>
+        <p:nvSpPr>
+          <p:cNvPr id="2" name="Заголовок 1">
+            <a:extLst>
+              <a:ext uri="{FF2B5EF4-FFF2-40B4-BE49-F238E27FC236}">
+                <a16:creationId xmlns:a16="http://schemas.microsoft.com/office/drawing/2014/main" id="{98E6CC54-1438-A64F-953C-EE135354C188}"/>
+              </a:ext>
+            </a:extLst>
+          </p:cNvPr>
+          <p:cNvSpPr>
+            <a:spLocks noGrp="1"/>
+          </p:cNvSpPr>
+          <p:nvPr>
+            <p:ph type="title"/>
+          </p:nvPr>
+        </p:nvSpPr>
+        <p:spPr/>
+        <p:txBody>
+          <a:bodyPr/>
+          <a:lstStyle/>
+          <a:p>
+            <a:r>
+              <a:rPr lang="ru-RU" dirty="0"/>
+              <a:t>Введение</a:t>
+            </a:r>
+          </a:p>
+        </p:txBody>
+      </p:sp>
+      <p:sp>
+        <p:nvSpPr>
+          <p:cNvPr id="3" name="Объект 2">
+            <a:extLst>
+              <a:ext uri="{FF2B5EF4-FFF2-40B4-BE49-F238E27FC236}">
+                <a16:creationId xmlns:a16="http://schemas.microsoft.com/office/drawing/2014/main" id="{22FFE0D1-4432-3739-4D53-40DAE9B2B9B9}"/>
+              </a:ext>
+            </a:extLst>
+          </p:cNvPr>
+          <p:cNvSpPr>
+            <a:spLocks noGrp="1"/>
+          </p:cNvSpPr>
+          <p:nvPr>
+            <p:ph idx="1"/>
+          </p:nvPr>
+        </p:nvSpPr>
+        <p:spPr>
+          <a:xfrm>
+            <a:off x="508001" y="1570567"/>
+            <a:ext cx="6720417" cy="4229099"/>
+          </a:xfrm>
+        </p:spPr>
+        <p:txBody>
+          <a:bodyPr/>
+          <a:lstStyle/>
+          <a:p>
+            <a:endParaRPr lang="ru-RU" i="1" dirty="0"/>
+          </a:p>
+          <a:p>
+            <a:r>
+              <a:rPr lang="ru-RU" dirty="0"/>
+              <a:t>"Плохой код делает одно и то же в сотне мест. </a:t>
+            </a:r>
+            <a:r>
+              <a:rPr lang="en-US" dirty="0"/>
+              <a:t> </a:t>
+            </a:r>
+            <a:r>
+              <a:rPr lang="ru-RU" dirty="0"/>
+              <a:t>Хороший код делает это один раз и правильно.“</a:t>
+            </a:r>
+            <a:endParaRPr lang="en-US" dirty="0"/>
+          </a:p>
+          <a:p>
+            <a:pPr marL="0" indent="0">
+              <a:buNone/>
+            </a:pPr>
+            <a:r>
+              <a:rPr lang="en-US" i="1" dirty="0"/>
+              <a:t>    </a:t>
+            </a:r>
+            <a:r>
+              <a:rPr lang="en-US" i="1" dirty="0">
+                <a:hlinkClick r:id="rId2"/>
+              </a:rPr>
+              <a:t>https://habr.com/ru/companies/beeline_tech/articles/731706/</a:t>
+            </a:r>
+            <a:r>
+              <a:rPr lang="en-US" i="1" dirty="0"/>
+              <a:t> </a:t>
+            </a:r>
+          </a:p>
+          <a:p>
+            <a:r>
+              <a:rPr lang="ru-RU" i="1" dirty="0"/>
+              <a:t>Необходимость повышения качества кода через правильную работу с данными появляется тогда, когда программист начинает работать с большими данными. Мне иногда было интересно посмотреть – как ведет себя система под нагрузкой</a:t>
+            </a:r>
+            <a:endParaRPr lang="ru-RU" dirty="0"/>
+          </a:p>
+        </p:txBody>
+      </p:sp>
+      <p:pic>
+        <p:nvPicPr>
+          <p:cNvPr id="5" name="Рисунок 4">
+            <a:extLst>
+              <a:ext uri="{FF2B5EF4-FFF2-40B4-BE49-F238E27FC236}">
+                <a16:creationId xmlns:a16="http://schemas.microsoft.com/office/drawing/2014/main" id="{7C4BD8AD-6088-6AD1-AC5E-4EFCC40177F5}"/>
+              </a:ext>
+            </a:extLst>
+          </p:cNvPr>
+          <p:cNvPicPr>
+            <a:picLocks noChangeAspect="1"/>
+          </p:cNvPicPr>
+          <p:nvPr/>
+        </p:nvPicPr>
+        <p:blipFill>
+          <a:blip r:embed="rId3"/>
+          <a:stretch>
+            <a:fillRect/>
+          </a:stretch>
+        </p:blipFill>
+        <p:spPr>
+          <a:xfrm>
+            <a:off x="7355418" y="1456267"/>
+            <a:ext cx="3973689" cy="2879050"/>
+          </a:xfrm>
+          <a:prstGeom prst="rect">
+            <a:avLst/>
+          </a:prstGeom>
+        </p:spPr>
+      </p:pic>
+    </p:spTree>
+    <p:extLst>
+      <p:ext uri="{BB962C8B-B14F-4D97-AF65-F5344CB8AC3E}">
+        <p14:creationId xmlns:p14="http://schemas.microsoft.com/office/powerpoint/2010/main" val="536533876"/>
+      </p:ext>
+    </p:extLst>
+  </p:cSld>
+  <p:clrMapOvr>
+    <a:masterClrMapping/>
+  </p:clrMapOvr>
+</p:sld>
+</file>
+
+<file path=ppt/slides/slide4.xml><?xml version="1.0" encoding="utf-8"?>
 <p:sld xmlns:a="http://schemas.openxmlformats.org/drawingml/2006/main" xmlns:r="http://schemas.openxmlformats.org/officeDocument/2006/relationships" xmlns:p="http://schemas.openxmlformats.org/presentationml/2006/main">
   <p:cSld>
     <p:spTree>
@@ -8541,7 +8779,7 @@
 </p:sld>
 </file>
 
-<file path=ppt/slides/slide4.xml><?xml version="1.0" encoding="utf-8"?>
+<file path=ppt/slides/slide5.xml><?xml version="1.0" encoding="utf-8"?>
 <p:sld xmlns:a="http://schemas.openxmlformats.org/drawingml/2006/main" xmlns:r="http://schemas.openxmlformats.org/officeDocument/2006/relationships" xmlns:p="http://schemas.openxmlformats.org/presentationml/2006/main">
   <p:cSld>
     <p:spTree>
@@ -8610,10 +8848,58 @@
         </p:nvSpPr>
         <p:spPr/>
         <p:txBody>
-          <a:bodyPr/>
+          <a:bodyPr>
+            <a:normAutofit fontScale="92500" lnSpcReduction="10000"/>
+          </a:bodyPr>
           <a:lstStyle/>
           <a:p>
-            <a:endParaRPr lang="ru-RU"/>
+            <a:r>
+              <a:rPr lang="ru-RU" dirty="0"/>
+              <a:t>Представим ситуацию: у нас есть валютная биржа, что выставляет локальные заявки на обмен или покупку валют по курсу. Предположим, что </a:t>
+            </a:r>
+            <a:r>
+              <a:rPr lang="en-US" dirty="0"/>
+              <a:t>“</a:t>
+            </a:r>
+            <a:r>
+              <a:rPr lang="ru-RU" dirty="0"/>
+              <a:t>плохой</a:t>
+            </a:r>
+            <a:r>
+              <a:rPr lang="en-US" dirty="0"/>
+              <a:t>”</a:t>
+            </a:r>
+            <a:r>
+              <a:rPr lang="ru-RU" dirty="0"/>
+              <a:t> (неосторожный) программист решил задачу организации следующим способом – сделал объекты и поля такими, когда в программе может существовать много валют (как объектов) с одним кодом (допустим, </a:t>
+            </a:r>
+            <a:r>
+              <a:rPr lang="en-US" dirty="0"/>
+              <a:t>USD</a:t>
+            </a:r>
+            <a:r>
+              <a:rPr lang="ru-RU" dirty="0"/>
+              <a:t>). ему придется писать метод для обновления всех инстансов, что составляет некоторую сложность реализации метода (затрачиваемые единицы времени)</a:t>
+            </a:r>
+            <a:endParaRPr lang="en-US" dirty="0"/>
+          </a:p>
+          <a:p>
+            <a:r>
+              <a:rPr lang="en-US" dirty="0"/>
+              <a:t>“</a:t>
+            </a:r>
+            <a:r>
+              <a:rPr lang="ru-RU" dirty="0"/>
+              <a:t>Хороший</a:t>
+            </a:r>
+            <a:r>
+              <a:rPr lang="en-US" dirty="0"/>
+              <a:t>”</a:t>
+            </a:r>
+            <a:r>
+              <a:rPr lang="ru-RU" dirty="0"/>
+              <a:t> (опытный) программист сделает так, чтобы нельзя было добавить следующую сущность с таким же кодом, а значение не придется менять постоянно – один раз написал метод и он подхватил значение курса ссылкой.</a:t>
+            </a:r>
           </a:p>
         </p:txBody>
       </p:sp>
@@ -8630,7 +8916,7 @@
 </p:sld>
 </file>
 
-<file path=ppt/slides/slide5.xml><?xml version="1.0" encoding="utf-8"?>
+<file path=ppt/slides/slide6.xml><?xml version="1.0" encoding="utf-8"?>
 <p:sld xmlns:a="http://schemas.openxmlformats.org/drawingml/2006/main" xmlns:r="http://schemas.openxmlformats.org/officeDocument/2006/relationships" xmlns:p="http://schemas.openxmlformats.org/presentationml/2006/main">
   <p:cSld>
     <p:spTree>
@@ -8753,7 +9039,7 @@
 </p:sld>
 </file>
 
-<file path=ppt/slides/slide6.xml><?xml version="1.0" encoding="utf-8"?>
+<file path=ppt/slides/slide7.xml><?xml version="1.0" encoding="utf-8"?>
 <p:sld xmlns:a="http://schemas.openxmlformats.org/drawingml/2006/main" xmlns:r="http://schemas.openxmlformats.org/officeDocument/2006/relationships" xmlns:p="http://schemas.openxmlformats.org/presentationml/2006/main">
   <p:cSld>
     <p:spTree>
@@ -8825,8 +9111,98 @@
         </p:blipFill>
         <p:spPr>
           <a:xfrm>
-            <a:off x="282575" y="219688"/>
+            <a:off x="125360" y="185209"/>
             <a:ext cx="5813425" cy="1491988"/>
+          </a:xfrm>
+          <a:prstGeom prst="rect">
+            <a:avLst/>
+          </a:prstGeom>
+        </p:spPr>
+      </p:pic>
+      <p:pic>
+        <p:nvPicPr>
+          <p:cNvPr id="4" name="Рисунок 3">
+            <a:extLst>
+              <a:ext uri="{FF2B5EF4-FFF2-40B4-BE49-F238E27FC236}">
+                <a16:creationId xmlns:a16="http://schemas.microsoft.com/office/drawing/2014/main" id="{BB39AB82-5DAC-39DA-6C8F-7A1787EC6E3E}"/>
+              </a:ext>
+            </a:extLst>
+          </p:cNvPr>
+          <p:cNvPicPr>
+            <a:picLocks noChangeAspect="1"/>
+          </p:cNvPicPr>
+          <p:nvPr/>
+        </p:nvPicPr>
+        <p:blipFill>
+          <a:blip r:embed="rId3"/>
+          <a:stretch>
+            <a:fillRect/>
+          </a:stretch>
+        </p:blipFill>
+        <p:spPr>
+          <a:xfrm>
+            <a:off x="125360" y="1623999"/>
+            <a:ext cx="5813425" cy="638433"/>
+          </a:xfrm>
+          <a:prstGeom prst="rect">
+            <a:avLst/>
+          </a:prstGeom>
+        </p:spPr>
+      </p:pic>
+      <p:pic>
+        <p:nvPicPr>
+          <p:cNvPr id="6" name="Объект 4">
+            <a:extLst>
+              <a:ext uri="{FF2B5EF4-FFF2-40B4-BE49-F238E27FC236}">
+                <a16:creationId xmlns:a16="http://schemas.microsoft.com/office/drawing/2014/main" id="{D792997C-138F-89D1-239A-9D5861A9F66F}"/>
+              </a:ext>
+            </a:extLst>
+          </p:cNvPr>
+          <p:cNvPicPr>
+            <a:picLocks noChangeAspect="1"/>
+          </p:cNvPicPr>
+          <p:nvPr/>
+        </p:nvPicPr>
+        <p:blipFill>
+          <a:blip r:embed="rId4"/>
+          <a:stretch>
+            <a:fillRect/>
+          </a:stretch>
+        </p:blipFill>
+        <p:spPr>
+          <a:xfrm>
+            <a:off x="6253216" y="210163"/>
+            <a:ext cx="5813424" cy="3449638"/>
+          </a:xfrm>
+          <a:prstGeom prst="rect">
+            <a:avLst/>
+          </a:prstGeom>
+        </p:spPr>
+      </p:pic>
+      <p:pic>
+        <p:nvPicPr>
+          <p:cNvPr id="9" name="Объект 4">
+            <a:extLst>
+              <a:ext uri="{FF2B5EF4-FFF2-40B4-BE49-F238E27FC236}">
+                <a16:creationId xmlns:a16="http://schemas.microsoft.com/office/drawing/2014/main" id="{F3D83381-41F3-7626-7077-43B87B7EB7BE}"/>
+              </a:ext>
+            </a:extLst>
+          </p:cNvPr>
+          <p:cNvPicPr>
+            <a:picLocks noChangeAspect="1"/>
+          </p:cNvPicPr>
+          <p:nvPr/>
+        </p:nvPicPr>
+        <p:blipFill>
+          <a:blip r:embed="rId5"/>
+          <a:stretch>
+            <a:fillRect/>
+          </a:stretch>
+        </p:blipFill>
+        <p:spPr>
+          <a:xfrm>
+            <a:off x="402166" y="3701222"/>
+            <a:ext cx="9382125" cy="3105150"/>
           </a:xfrm>
           <a:prstGeom prst="rect">
             <a:avLst/>
@@ -8846,7 +9222,7 @@
 </p:sld>
 </file>
 
-<file path=ppt/slides/slide7.xml><?xml version="1.0" encoding="utf-8"?>
+<file path=ppt/slides/slide8.xml><?xml version="1.0" encoding="utf-8"?>
 <p:sld xmlns:a="http://schemas.openxmlformats.org/drawingml/2006/main" xmlns:r="http://schemas.openxmlformats.org/officeDocument/2006/relationships" xmlns:p="http://schemas.openxmlformats.org/presentationml/2006/main">
   <p:cSld>
     <p:spTree>
@@ -8854,7 +9230,7 @@
         <p:cNvPr id="1" name="">
           <a:extLst>
             <a:ext uri="{FF2B5EF4-FFF2-40B4-BE49-F238E27FC236}">
-              <a16:creationId xmlns:a16="http://schemas.microsoft.com/office/drawing/2014/main" id="{E427B614-4177-D7A1-31A9-4D158FEB5D90}"/>
+              <a16:creationId xmlns:a16="http://schemas.microsoft.com/office/drawing/2014/main" id="{18B0DACC-FC3F-2B46-FAE0-9397D71042F9}"/>
             </a:ext>
           </a:extLst>
         </p:cNvPr>
@@ -8874,7 +9250,7 @@
           <p:cNvPr id="2" name="Заголовок 1">
             <a:extLst>
               <a:ext uri="{FF2B5EF4-FFF2-40B4-BE49-F238E27FC236}">
-                <a16:creationId xmlns:a16="http://schemas.microsoft.com/office/drawing/2014/main" id="{B319A909-8B42-A190-30D6-259DFFB52C83}"/>
+                <a16:creationId xmlns:a16="http://schemas.microsoft.com/office/drawing/2014/main" id="{CAF79BA6-054D-35CE-5C9C-DFEC03163158}"/>
               </a:ext>
             </a:extLst>
           </p:cNvPr>
@@ -8890,22 +9266,109 @@
           <a:bodyPr/>
           <a:lstStyle/>
           <a:p>
-            <a:r>
-              <a:rPr lang="ru-RU" dirty="0"/>
-              <a:t>2. замена ссылки значением </a:t>
-            </a:r>
-          </a:p>
-        </p:txBody>
-      </p:sp>
-      <p:sp>
-        <p:nvSpPr>
-          <p:cNvPr id="3" name="Объект 2">
+            <a:endParaRPr lang="ru-RU" dirty="0"/>
+          </a:p>
+        </p:txBody>
+      </p:sp>
+      <p:pic>
+        <p:nvPicPr>
+          <p:cNvPr id="13" name="Рисунок 12">
             <a:extLst>
               <a:ext uri="{FF2B5EF4-FFF2-40B4-BE49-F238E27FC236}">
-                <a16:creationId xmlns:a16="http://schemas.microsoft.com/office/drawing/2014/main" id="{3D8AE37E-FAD7-8929-B92F-4F0A6B546C60}"/>
+                <a16:creationId xmlns:a16="http://schemas.microsoft.com/office/drawing/2014/main" id="{2B5F05EB-463F-9658-76D5-043733346583}"/>
               </a:ext>
             </a:extLst>
           </p:cNvPr>
+          <p:cNvPicPr>
+            <a:picLocks noChangeAspect="1"/>
+          </p:cNvPicPr>
+          <p:nvPr/>
+        </p:nvPicPr>
+        <p:blipFill>
+          <a:blip r:embed="rId2"/>
+          <a:stretch>
+            <a:fillRect/>
+          </a:stretch>
+        </p:blipFill>
+        <p:spPr>
+          <a:xfrm>
+            <a:off x="0" y="0"/>
+            <a:ext cx="6380057" cy="3522267"/>
+          </a:xfrm>
+          <a:prstGeom prst="rect">
+            <a:avLst/>
+          </a:prstGeom>
+        </p:spPr>
+      </p:pic>
+      <p:pic>
+        <p:nvPicPr>
+          <p:cNvPr id="15" name="Рисунок 14">
+            <a:extLst>
+              <a:ext uri="{FF2B5EF4-FFF2-40B4-BE49-F238E27FC236}">
+                <a16:creationId xmlns:a16="http://schemas.microsoft.com/office/drawing/2014/main" id="{9ECD2D63-F748-D11D-62D0-C15CE152B85B}"/>
+              </a:ext>
+            </a:extLst>
+          </p:cNvPr>
+          <p:cNvPicPr>
+            <a:picLocks noChangeAspect="1"/>
+          </p:cNvPicPr>
+          <p:nvPr/>
+        </p:nvPicPr>
+        <p:blipFill>
+          <a:blip r:embed="rId3"/>
+          <a:stretch>
+            <a:fillRect/>
+          </a:stretch>
+        </p:blipFill>
+        <p:spPr>
+          <a:xfrm>
+            <a:off x="6618620" y="3496733"/>
+            <a:ext cx="4197670" cy="1311231"/>
+          </a:xfrm>
+          <a:prstGeom prst="rect">
+            <a:avLst/>
+          </a:prstGeom>
+        </p:spPr>
+      </p:pic>
+      <p:pic>
+        <p:nvPicPr>
+          <p:cNvPr id="17" name="Рисунок 16">
+            <a:extLst>
+              <a:ext uri="{FF2B5EF4-FFF2-40B4-BE49-F238E27FC236}">
+                <a16:creationId xmlns:a16="http://schemas.microsoft.com/office/drawing/2014/main" id="{4C9D1B5C-FE03-3DB5-3CB2-06B03BB6ECA5}"/>
+              </a:ext>
+            </a:extLst>
+          </p:cNvPr>
+          <p:cNvPicPr>
+            <a:picLocks noChangeAspect="1"/>
+          </p:cNvPicPr>
+          <p:nvPr/>
+        </p:nvPicPr>
+        <p:blipFill>
+          <a:blip r:embed="rId4"/>
+          <a:stretch>
+            <a:fillRect/>
+          </a:stretch>
+        </p:blipFill>
+        <p:spPr>
+          <a:xfrm>
+            <a:off x="6380057" y="-17927"/>
+            <a:ext cx="5886777" cy="3540193"/>
+          </a:xfrm>
+          <a:prstGeom prst="rect">
+            <a:avLst/>
+          </a:prstGeom>
+        </p:spPr>
+      </p:pic>
+      <p:sp>
+        <p:nvSpPr>
+          <p:cNvPr id="19" name="Объект 18">
+            <a:extLst>
+              <a:ext uri="{FF2B5EF4-FFF2-40B4-BE49-F238E27FC236}">
+                <a16:creationId xmlns:a16="http://schemas.microsoft.com/office/drawing/2014/main" id="{F2C57EB3-CADD-CA0F-18A6-4DF1F5330620}"/>
+              </a:ext>
+            </a:extLst>
+          </p:cNvPr>
           <p:cNvSpPr>
             <a:spLocks noGrp="1"/>
           </p:cNvSpPr>
@@ -8913,105 +9376,54 @@
             <p:ph idx="1"/>
           </p:nvPr>
         </p:nvSpPr>
-        <p:spPr/>
+        <p:spPr>
+          <a:xfrm>
+            <a:off x="10140379" y="3496733"/>
+            <a:ext cx="2325721" cy="2655412"/>
+          </a:xfrm>
+        </p:spPr>
         <p:txBody>
           <a:bodyPr/>
           <a:lstStyle/>
           <a:p>
-            <a:endParaRPr lang="ru-RU"/>
-          </a:p>
-        </p:txBody>
-      </p:sp>
+            <a:endParaRPr lang="ru-RU" dirty="0"/>
+          </a:p>
+        </p:txBody>
+      </p:sp>
+      <p:pic>
+        <p:nvPicPr>
+          <p:cNvPr id="20" name="Объект 4">
+            <a:extLst>
+              <a:ext uri="{FF2B5EF4-FFF2-40B4-BE49-F238E27FC236}">
+                <a16:creationId xmlns:a16="http://schemas.microsoft.com/office/drawing/2014/main" id="{C20BF814-4D8B-9730-C5DC-ACBD361FEEA6}"/>
+              </a:ext>
+            </a:extLst>
+          </p:cNvPr>
+          <p:cNvPicPr>
+            <a:picLocks noChangeAspect="1"/>
+          </p:cNvPicPr>
+          <p:nvPr/>
+        </p:nvPicPr>
+        <p:blipFill>
+          <a:blip r:embed="rId5"/>
+          <a:stretch>
+            <a:fillRect/>
+          </a:stretch>
+        </p:blipFill>
+        <p:spPr>
+          <a:xfrm>
+            <a:off x="1054629" y="4824439"/>
+            <a:ext cx="7913368" cy="1962641"/>
+          </a:xfrm>
+          <a:prstGeom prst="rect">
+            <a:avLst/>
+          </a:prstGeom>
+        </p:spPr>
+      </p:pic>
     </p:spTree>
     <p:extLst>
       <p:ext uri="{BB962C8B-B14F-4D97-AF65-F5344CB8AC3E}">
-        <p14:creationId xmlns:p14="http://schemas.microsoft.com/office/powerpoint/2010/main" val="2568001900"/>
-      </p:ext>
-    </p:extLst>
-  </p:cSld>
-  <p:clrMapOvr>
-    <a:masterClrMapping/>
-  </p:clrMapOvr>
-</p:sld>
-</file>
-
-<file path=ppt/slides/slide8.xml><?xml version="1.0" encoding="utf-8"?>
-<p:sld xmlns:a="http://schemas.openxmlformats.org/drawingml/2006/main" xmlns:r="http://schemas.openxmlformats.org/officeDocument/2006/relationships" xmlns:p="http://schemas.openxmlformats.org/presentationml/2006/main">
-  <p:cSld>
-    <p:spTree>
-      <p:nvGrpSpPr>
-        <p:cNvPr id="1" name="">
-          <a:extLst>
-            <a:ext uri="{FF2B5EF4-FFF2-40B4-BE49-F238E27FC236}">
-              <a16:creationId xmlns:a16="http://schemas.microsoft.com/office/drawing/2014/main" id="{F743BF00-24CD-F55A-FD8F-466E8C5DA62F}"/>
-            </a:ext>
-          </a:extLst>
-        </p:cNvPr>
-        <p:cNvGrpSpPr/>
-        <p:nvPr/>
-      </p:nvGrpSpPr>
-      <p:grpSpPr>
-        <a:xfrm>
-          <a:off x="0" y="0"/>
-          <a:ext cx="0" cy="0"/>
-          <a:chOff x="0" y="0"/>
-          <a:chExt cx="0" cy="0"/>
-        </a:xfrm>
-      </p:grpSpPr>
-      <p:sp>
-        <p:nvSpPr>
-          <p:cNvPr id="2" name="Заголовок 1">
-            <a:extLst>
-              <a:ext uri="{FF2B5EF4-FFF2-40B4-BE49-F238E27FC236}">
-                <a16:creationId xmlns:a16="http://schemas.microsoft.com/office/drawing/2014/main" id="{D4B7B822-BABD-13C6-CB0A-A6A04B00D799}"/>
-              </a:ext>
-            </a:extLst>
-          </p:cNvPr>
-          <p:cNvSpPr>
-            <a:spLocks noGrp="1"/>
-          </p:cNvSpPr>
-          <p:nvPr>
-            <p:ph type="title"/>
-          </p:nvPr>
-        </p:nvSpPr>
-        <p:spPr/>
-        <p:txBody>
-          <a:bodyPr/>
-          <a:lstStyle/>
-          <a:p>
-            <a:endParaRPr lang="ru-RU"/>
-          </a:p>
-        </p:txBody>
-      </p:sp>
-      <p:sp>
-        <p:nvSpPr>
-          <p:cNvPr id="3" name="Объект 2">
-            <a:extLst>
-              <a:ext uri="{FF2B5EF4-FFF2-40B4-BE49-F238E27FC236}">
-                <a16:creationId xmlns:a16="http://schemas.microsoft.com/office/drawing/2014/main" id="{CE7B7D3C-8CC6-2CFC-7CCC-035EFEF2BB84}"/>
-              </a:ext>
-            </a:extLst>
-          </p:cNvPr>
-          <p:cNvSpPr>
-            <a:spLocks noGrp="1"/>
-          </p:cNvSpPr>
-          <p:nvPr>
-            <p:ph idx="1"/>
-          </p:nvPr>
-        </p:nvSpPr>
-        <p:spPr/>
-        <p:txBody>
-          <a:bodyPr/>
-          <a:lstStyle/>
-          <a:p>
-            <a:endParaRPr lang="ru-RU"/>
-          </a:p>
-        </p:txBody>
-      </p:sp>
-    </p:spTree>
-    <p:extLst>
-      <p:ext uri="{BB962C8B-B14F-4D97-AF65-F5344CB8AC3E}">
-        <p14:creationId xmlns:p14="http://schemas.microsoft.com/office/powerpoint/2010/main" val="3509401644"/>
+        <p14:creationId xmlns:p14="http://schemas.microsoft.com/office/powerpoint/2010/main" val="442152658"/>
       </p:ext>
     </p:extLst>
   </p:cSld>
@@ -9029,7 +9441,7 @@
         <p:cNvPr id="1" name="">
           <a:extLst>
             <a:ext uri="{FF2B5EF4-FFF2-40B4-BE49-F238E27FC236}">
-              <a16:creationId xmlns:a16="http://schemas.microsoft.com/office/drawing/2014/main" id="{49916EA7-9E49-9D50-EB55-122153255A8F}"/>
+              <a16:creationId xmlns:a16="http://schemas.microsoft.com/office/drawing/2014/main" id="{B00E427A-E905-2064-AF5D-B17AFEB815AA}"/>
             </a:ext>
           </a:extLst>
         </p:cNvPr>
@@ -9049,7 +9461,7 @@
           <p:cNvPr id="2" name="Заголовок 1">
             <a:extLst>
               <a:ext uri="{FF2B5EF4-FFF2-40B4-BE49-F238E27FC236}">
-                <a16:creationId xmlns:a16="http://schemas.microsoft.com/office/drawing/2014/main" id="{8245E395-5BFB-604E-6BC5-06BBE3184EA4}"/>
+                <a16:creationId xmlns:a16="http://schemas.microsoft.com/office/drawing/2014/main" id="{FE339AFD-34AD-CB0E-32D2-D28B3FE04526}"/>
               </a:ext>
             </a:extLst>
           </p:cNvPr>
@@ -9067,17 +9479,17 @@
           <a:p>
             <a:r>
               <a:rPr lang="ru-RU" dirty="0"/>
-              <a:t>3. Дублирование видимых данных</a:t>
-            </a:r>
-          </a:p>
-        </p:txBody>
-      </p:sp>
-      <p:sp>
-        <p:nvSpPr>
-          <p:cNvPr id="3" name="Объект 2">
+              <a:t>Выводы</a:t>
+            </a:r>
+          </a:p>
+        </p:txBody>
+      </p:sp>
+      <p:sp>
+        <p:nvSpPr>
+          <p:cNvPr id="7" name="Объект 6">
             <a:extLst>
               <a:ext uri="{FF2B5EF4-FFF2-40B4-BE49-F238E27FC236}">
-                <a16:creationId xmlns:a16="http://schemas.microsoft.com/office/drawing/2014/main" id="{1829D0BC-74B0-EB6F-1449-88DB56753D7F}"/>
+                <a16:creationId xmlns:a16="http://schemas.microsoft.com/office/drawing/2014/main" id="{85A13928-176D-81C4-1F0E-4C4254DF06FD}"/>
               </a:ext>
             </a:extLst>
           </p:cNvPr>
@@ -9100,7 +9512,7 @@
     </p:spTree>
     <p:extLst>
       <p:ext uri="{BB962C8B-B14F-4D97-AF65-F5344CB8AC3E}">
-        <p14:creationId xmlns:p14="http://schemas.microsoft.com/office/powerpoint/2010/main" val="2429912846"/>
+        <p14:creationId xmlns:p14="http://schemas.microsoft.com/office/powerpoint/2010/main" val="752680804"/>
       </p:ext>
     </p:extLst>
   </p:cSld>
